--- a/src/assets/PPT/SRCAS HACKATHON 3.0.pptx
+++ b/src/assets/PPT/SRCAS HACKATHON 3.0.pptx
@@ -1,39 +1,38 @@
 
 <file path=ppt/presentation.xml><?xml version="1.0" encoding="utf-8"?>
-<p:presentation xmlns:a="http://schemas.openxmlformats.org/drawingml/2006/main" xmlns:r="http://schemas.openxmlformats.org/officeDocument/2006/relationships" xmlns:p="http://schemas.openxmlformats.org/presentationml/2006/main" embedTrueTypeFonts="1" saveSubsetFonts="1">
+<p:presentation xmlns:a="http://schemas.openxmlformats.org/drawingml/2006/main" xmlns:r="http://schemas.openxmlformats.org/officeDocument/2006/relationships" xmlns:p="http://schemas.openxmlformats.org/presentationml/2006/main" saveSubsetFonts="1" embedTrueTypeFonts="true">
   <p:sldMasterIdLst>
     <p:sldMasterId id="2147483648" r:id="rId1"/>
   </p:sldMasterIdLst>
   <p:notesMasterIdLst>
-    <p:notesMasterId r:id="rId8"/>
+    <p:notesMasterId r:id="rId12"/>
   </p:notesMasterIdLst>
   <p:sldIdLst>
-    <p:sldId id="256" r:id="rId2"/>
-    <p:sldId id="257" r:id="rId3"/>
-    <p:sldId id="258" r:id="rId4"/>
-    <p:sldId id="259" r:id="rId5"/>
-    <p:sldId id="260" r:id="rId6"/>
-    <p:sldId id="261" r:id="rId7"/>
+    <p:sldId id="256" r:id="rId6"/>
+    <p:sldId id="257" r:id="rId7"/>
+    <p:sldId id="258" r:id="rId8"/>
+    <p:sldId id="259" r:id="rId9"/>
+    <p:sldId id="260" r:id="rId10"/>
+    <p:sldId id="261" r:id="rId11"/>
   </p:sldIdLst>
   <p:sldSz cx="18288000" cy="10287000"/>
   <p:notesSz cx="6858000" cy="9144000"/>
   <p:embeddedFontLst>
     <p:embeddedFont>
-      <p:font typeface="Arial Bold" panose="020B0704020202020204" pitchFamily="34" charset="0"/>
-      <p:regular r:id="rId9"/>
-      <p:bold r:id="rId10"/>
+      <p:font typeface="Cambria" charset="1" panose="02040503050406030204"/>
+      <p:regular r:id="rId15"/>
     </p:embeddedFont>
     <p:embeddedFont>
-      <p:font typeface="Cambria" panose="02040503050406030204" pitchFamily="18" charset="0"/>
-      <p:regular r:id="rId11"/>
-      <p:bold r:id="rId12"/>
-      <p:italic r:id="rId13"/>
-      <p:boldItalic r:id="rId14"/>
+      <p:font typeface="Cambria Bold" charset="1" panose="02040803050406030204"/>
+      <p:regular r:id="rId16"/>
     </p:embeddedFont>
     <p:embeddedFont>
-      <p:font typeface="Cambria Bold" panose="02040803050406030204" pitchFamily="18" charset="0"/>
-      <p:regular r:id="rId15"/>
-      <p:bold r:id="rId16"/>
+      <p:font typeface="Times New Roman" charset="1" panose="02020603050405020304"/>
+      <p:regular r:id="rId18"/>
+    </p:embeddedFont>
+    <p:embeddedFont>
+      <p:font typeface="Arial Bold" charset="1" panose="020B0704020202020204"/>
+      <p:regular r:id="rId21"/>
     </p:embeddedFont>
   </p:embeddedFontLst>
   <p:defaultTextStyle>
@@ -131,22 +130,6 @@
       </a:defRPr>
     </a:lvl9pPr>
   </p:defaultTextStyle>
-  <p:extLst>
-    <p:ext uri="{EFAFB233-063F-42B5-8137-9DF3F51BA10A}">
-      <p15:sldGuideLst xmlns:p15="http://schemas.microsoft.com/office/powerpoint/2012/main">
-        <p15:guide id="1" orient="horz" pos="2160">
-          <p15:clr>
-            <a:srgbClr val="A4A3A4"/>
-          </p15:clr>
-        </p15:guide>
-        <p15:guide id="2" pos="2880">
-          <p15:clr>
-            <a:srgbClr val="A4A3A4"/>
-          </p15:clr>
-        </p15:guide>
-      </p15:sldGuideLst>
-    </p:ext>
-  </p:extLst>
 </p:presentation>
 </file>
 
@@ -232,7 +215,7 @@
           <a:p>
             <a:fld id="{B7268E1E-0E44-426D-905E-8AD9B19D2182}" type="datetimeFigureOut">
               <a:rPr lang="cs-CZ" smtClean="0"/>
-              <a:t>04.06.2026</a:t>
+              <a:t>1.7.2013</a:t>
             </a:fld>
             <a:endParaRPr lang="cs-CZ"/>
           </a:p>
@@ -296,35 +279,35 @@
           <a:p>
             <a:pPr lvl="0"/>
             <a:r>
-              <a:rPr lang="en-US"/>
+              <a:rPr lang="en-US" smtClean="0"/>
               <a:t>Click to edit Master text styles</a:t>
             </a:r>
           </a:p>
           <a:p>
             <a:pPr lvl="1"/>
             <a:r>
-              <a:rPr lang="en-US"/>
+              <a:rPr lang="en-US" smtClean="0"/>
               <a:t>Second level</a:t>
             </a:r>
           </a:p>
           <a:p>
             <a:pPr lvl="2"/>
             <a:r>
-              <a:rPr lang="en-US"/>
+              <a:rPr lang="en-US" smtClean="0"/>
               <a:t>Third level</a:t>
             </a:r>
           </a:p>
           <a:p>
             <a:pPr lvl="3"/>
             <a:r>
-              <a:rPr lang="en-US"/>
+              <a:rPr lang="en-US" smtClean="0"/>
               <a:t>Fourth level</a:t>
             </a:r>
           </a:p>
           <a:p>
             <a:pPr lvl="4"/>
             <a:r>
-              <a:rPr lang="en-US"/>
+              <a:rPr lang="en-US" smtClean="0"/>
               <a:t>Fifth level</a:t>
             </a:r>
             <a:endParaRPr lang="cs-CZ"/>
@@ -501,9 +484,9 @@
 </file>
 
 <file path=ppt/notesSlides/notesSlide1.xml><?xml version="1.0" encoding="utf-8"?>
-<p:notes xmlns:a="http://schemas.openxmlformats.org/drawingml/2006/main" xmlns:r="http://schemas.openxmlformats.org/officeDocument/2006/relationships" xmlns:p="http://schemas.openxmlformats.org/presentationml/2006/main">
+<p:notes xmlns:p="http://schemas.openxmlformats.org/presentationml/2006/main" xmlns:a="http://schemas.openxmlformats.org/drawingml/2006/main">
   <p:cSld>
-    <p:spTree>
+    <p:spTree xmlns:r="http://schemas.openxmlformats.org/officeDocument/2006/relationships">
       <p:nvGrpSpPr>
         <p:cNvPr id="1" name=""/>
         <p:cNvGrpSpPr/>
@@ -543,9 +526,7 @@
               <a:defRPr sz="1200"/>
             </a:lvl1pPr>
           </a:lstStyle>
-          <a:p>
-            <a:endParaRPr/>
-          </a:p>
+          <a:p/>
         </p:txBody>
       </p:sp>
       <p:sp>
@@ -575,8 +556,8 @@
             </a:lvl1pPr>
           </a:lstStyle>
           <a:p>
-            <a:r>
-              <a:rPr lang="cs-CZ"/>
+            <a:r id="{B7268E1E-0E44-426D-905E-8AD9B19D2182}" type="datetimeFigureOut">
+              <a:rPr lang="cs-CZ" smtClean="0"/>
               <a:t>1.7.2013</a:t>
             </a:r>
           </a:p>
@@ -594,8 +575,8 @@
         </p:nvSpPr>
         <p:spPr>
           <a:xfrm>
-            <a:off x="2290763" y="512763"/>
-            <a:ext cx="4562475" cy="2566987"/>
+            <a:off x="2857500" y="512763"/>
+            <a:ext cx="3429000" cy="2566987"/>
           </a:xfrm>
           <a:prstGeom prst="rect">
             <a:avLst/>
@@ -610,9 +591,7 @@
         <p:txBody>
           <a:bodyPr vert="horz" lIns="91440" tIns="45720" rIns="91440" bIns="45720" rtlCol="0" anchor="ctr"/>
           <a:lstStyle/>
-          <a:p>
-            <a:endParaRPr/>
-          </a:p>
+          <a:p/>
         </p:txBody>
       </p:sp>
       <p:sp>
@@ -644,10 +623,40 @@
             </a:r>
           </a:p>
           <a:p>
-            <a:endParaRPr lang="en-US"/>
-          </a:p>
-          <a:p>
-            <a:endParaRPr lang="en-US"/>
+            <a:r>
+              <a:rPr lang="en-US"/>
+              <a:t/>
+            </a:r>
+          </a:p>
+          <a:p>
+            <a:r>
+              <a:rPr lang="en-US"/>
+              <a:t>1.7.2013</a:t>
+            </a:r>
+          </a:p>
+          <a:p>
+            <a:r>
+              <a:rPr lang="en-US"/>
+              <a:t/>
+            </a:r>
+          </a:p>
+          <a:p>
+            <a:r>
+              <a:rPr lang="en-US"/>
+              <a:t/>
+            </a:r>
+          </a:p>
+          <a:p>
+            <a:r>
+              <a:rPr lang="en-US"/>
+              <a:t>‹#›</a:t>
+            </a:r>
+          </a:p>
+          <a:p>
+            <a:r>
+              <a:rPr lang="en-US"/>
+              <a:t/>
+            </a:r>
           </a:p>
           <a:p>
             <a:r>
@@ -683,9 +692,7 @@
               <a:defRPr sz="1200"/>
             </a:lvl1pPr>
           </a:lstStyle>
-          <a:p>
-            <a:endParaRPr/>
-          </a:p>
+          <a:p/>
         </p:txBody>
       </p:sp>
       <p:sp>
@@ -715,8 +722,8 @@
             </a:lvl1pPr>
           </a:lstStyle>
           <a:p>
-            <a:r>
-              <a:rPr lang="cs-CZ"/>
+            <a:r id="{871B2431-D351-4C6E-A3CF-9DFAC0E3E050}" type="slidenum">
+              <a:rPr lang="cs-CZ" smtClean="0"/>
               <a:t>‹#›</a:t>
             </a:r>
           </a:p>
@@ -731,9 +738,9 @@
 </file>
 
 <file path=ppt/notesSlides/notesSlide2.xml><?xml version="1.0" encoding="utf-8"?>
-<p:notes xmlns:a="http://schemas.openxmlformats.org/drawingml/2006/main" xmlns:r="http://schemas.openxmlformats.org/officeDocument/2006/relationships" xmlns:p="http://schemas.openxmlformats.org/presentationml/2006/main">
+<p:notes xmlns:p="http://schemas.openxmlformats.org/presentationml/2006/main" xmlns:a="http://schemas.openxmlformats.org/drawingml/2006/main">
   <p:cSld>
-    <p:spTree>
+    <p:spTree xmlns:r="http://schemas.openxmlformats.org/officeDocument/2006/relationships">
       <p:nvGrpSpPr>
         <p:cNvPr id="1" name=""/>
         <p:cNvGrpSpPr/>
@@ -773,9 +780,7 @@
               <a:defRPr sz="1200"/>
             </a:lvl1pPr>
           </a:lstStyle>
-          <a:p>
-            <a:endParaRPr/>
-          </a:p>
+          <a:p/>
         </p:txBody>
       </p:sp>
       <p:sp>
@@ -805,8 +810,8 @@
             </a:lvl1pPr>
           </a:lstStyle>
           <a:p>
-            <a:r>
-              <a:rPr lang="cs-CZ"/>
+            <a:r id="{B7268E1E-0E44-426D-905E-8AD9B19D2182}" type="datetimeFigureOut">
+              <a:rPr lang="cs-CZ" smtClean="0"/>
               <a:t>1.7.2013</a:t>
             </a:r>
           </a:p>
@@ -824,8 +829,8 @@
         </p:nvSpPr>
         <p:spPr>
           <a:xfrm>
-            <a:off x="2290763" y="512763"/>
-            <a:ext cx="4562475" cy="2566987"/>
+            <a:off x="2857500" y="512763"/>
+            <a:ext cx="3429000" cy="2566987"/>
           </a:xfrm>
           <a:prstGeom prst="rect">
             <a:avLst/>
@@ -840,9 +845,7 @@
         <p:txBody>
           <a:bodyPr vert="horz" lIns="91440" tIns="45720" rIns="91440" bIns="45720" rtlCol="0" anchor="ctr"/>
           <a:lstStyle/>
-          <a:p>
-            <a:endParaRPr/>
-          </a:p>
+          <a:p/>
         </p:txBody>
       </p:sp>
       <p:sp>
@@ -874,10 +877,40 @@
             </a:r>
           </a:p>
           <a:p>
-            <a:endParaRPr lang="en-US"/>
-          </a:p>
-          <a:p>
-            <a:endParaRPr lang="en-US"/>
+            <a:r>
+              <a:rPr lang="en-US"/>
+              <a:t/>
+            </a:r>
+          </a:p>
+          <a:p>
+            <a:r>
+              <a:rPr lang="en-US"/>
+              <a:t>1.7.2013</a:t>
+            </a:r>
+          </a:p>
+          <a:p>
+            <a:r>
+              <a:rPr lang="en-US"/>
+              <a:t/>
+            </a:r>
+          </a:p>
+          <a:p>
+            <a:r>
+              <a:rPr lang="en-US"/>
+              <a:t/>
+            </a:r>
+          </a:p>
+          <a:p>
+            <a:r>
+              <a:rPr lang="en-US"/>
+              <a:t>‹#›</a:t>
+            </a:r>
+          </a:p>
+          <a:p>
+            <a:r>
+              <a:rPr lang="en-US"/>
+              <a:t/>
+            </a:r>
           </a:p>
           <a:p>
             <a:r>
@@ -913,9 +946,7 @@
               <a:defRPr sz="1200"/>
             </a:lvl1pPr>
           </a:lstStyle>
-          <a:p>
-            <a:endParaRPr/>
-          </a:p>
+          <a:p/>
         </p:txBody>
       </p:sp>
       <p:sp>
@@ -945,8 +976,8 @@
             </a:lvl1pPr>
           </a:lstStyle>
           <a:p>
-            <a:r>
-              <a:rPr lang="cs-CZ"/>
+            <a:r id="{871B2431-D351-4C6E-A3CF-9DFAC0E3E050}" type="slidenum">
+              <a:rPr lang="cs-CZ" smtClean="0"/>
               <a:t>‹#›</a:t>
             </a:r>
           </a:p>
@@ -961,9 +992,9 @@
 </file>
 
 <file path=ppt/notesSlides/notesSlide3.xml><?xml version="1.0" encoding="utf-8"?>
-<p:notes xmlns:a="http://schemas.openxmlformats.org/drawingml/2006/main" xmlns:r="http://schemas.openxmlformats.org/officeDocument/2006/relationships" xmlns:p="http://schemas.openxmlformats.org/presentationml/2006/main">
+<p:notes xmlns:p="http://schemas.openxmlformats.org/presentationml/2006/main" xmlns:a="http://schemas.openxmlformats.org/drawingml/2006/main">
   <p:cSld>
-    <p:spTree>
+    <p:spTree xmlns:r="http://schemas.openxmlformats.org/officeDocument/2006/relationships">
       <p:nvGrpSpPr>
         <p:cNvPr id="1" name=""/>
         <p:cNvGrpSpPr/>
@@ -1003,9 +1034,7 @@
               <a:defRPr sz="1200"/>
             </a:lvl1pPr>
           </a:lstStyle>
-          <a:p>
-            <a:endParaRPr/>
-          </a:p>
+          <a:p/>
         </p:txBody>
       </p:sp>
       <p:sp>
@@ -1035,8 +1064,8 @@
             </a:lvl1pPr>
           </a:lstStyle>
           <a:p>
-            <a:r>
-              <a:rPr lang="cs-CZ"/>
+            <a:r id="{B7268E1E-0E44-426D-905E-8AD9B19D2182}" type="datetimeFigureOut">
+              <a:rPr lang="cs-CZ" smtClean="0"/>
               <a:t>1.7.2013</a:t>
             </a:r>
           </a:p>
@@ -1054,8 +1083,8 @@
         </p:nvSpPr>
         <p:spPr>
           <a:xfrm>
-            <a:off x="2290763" y="512763"/>
-            <a:ext cx="4562475" cy="2566987"/>
+            <a:off x="2857500" y="512763"/>
+            <a:ext cx="3429000" cy="2566987"/>
           </a:xfrm>
           <a:prstGeom prst="rect">
             <a:avLst/>
@@ -1070,9 +1099,7 @@
         <p:txBody>
           <a:bodyPr vert="horz" lIns="91440" tIns="45720" rIns="91440" bIns="45720" rtlCol="0" anchor="ctr"/>
           <a:lstStyle/>
-          <a:p>
-            <a:endParaRPr/>
-          </a:p>
+          <a:p/>
         </p:txBody>
       </p:sp>
       <p:sp>
@@ -1104,10 +1131,40 @@
             </a:r>
           </a:p>
           <a:p>
-            <a:endParaRPr lang="en-US"/>
-          </a:p>
-          <a:p>
-            <a:endParaRPr lang="en-US"/>
+            <a:r>
+              <a:rPr lang="en-US"/>
+              <a:t/>
+            </a:r>
+          </a:p>
+          <a:p>
+            <a:r>
+              <a:rPr lang="en-US"/>
+              <a:t>1.7.2013</a:t>
+            </a:r>
+          </a:p>
+          <a:p>
+            <a:r>
+              <a:rPr lang="en-US"/>
+              <a:t/>
+            </a:r>
+          </a:p>
+          <a:p>
+            <a:r>
+              <a:rPr lang="en-US"/>
+              <a:t/>
+            </a:r>
+          </a:p>
+          <a:p>
+            <a:r>
+              <a:rPr lang="en-US"/>
+              <a:t>‹#›</a:t>
+            </a:r>
+          </a:p>
+          <a:p>
+            <a:r>
+              <a:rPr lang="en-US"/>
+              <a:t/>
+            </a:r>
           </a:p>
           <a:p>
             <a:r>
@@ -1143,9 +1200,7 @@
               <a:defRPr sz="1200"/>
             </a:lvl1pPr>
           </a:lstStyle>
-          <a:p>
-            <a:endParaRPr/>
-          </a:p>
+          <a:p/>
         </p:txBody>
       </p:sp>
       <p:sp>
@@ -1175,8 +1230,8 @@
             </a:lvl1pPr>
           </a:lstStyle>
           <a:p>
-            <a:r>
-              <a:rPr lang="cs-CZ"/>
+            <a:r id="{871B2431-D351-4C6E-A3CF-9DFAC0E3E050}" type="slidenum">
+              <a:rPr lang="cs-CZ" smtClean="0"/>
               <a:t>‹#›</a:t>
             </a:r>
           </a:p>
@@ -1191,9 +1246,9 @@
 </file>
 
 <file path=ppt/notesSlides/notesSlide4.xml><?xml version="1.0" encoding="utf-8"?>
-<p:notes xmlns:a="http://schemas.openxmlformats.org/drawingml/2006/main" xmlns:r="http://schemas.openxmlformats.org/officeDocument/2006/relationships" xmlns:p="http://schemas.openxmlformats.org/presentationml/2006/main">
+<p:notes xmlns:p="http://schemas.openxmlformats.org/presentationml/2006/main" xmlns:a="http://schemas.openxmlformats.org/drawingml/2006/main">
   <p:cSld>
-    <p:spTree>
+    <p:spTree xmlns:r="http://schemas.openxmlformats.org/officeDocument/2006/relationships">
       <p:nvGrpSpPr>
         <p:cNvPr id="1" name=""/>
         <p:cNvGrpSpPr/>
@@ -1233,9 +1288,7 @@
               <a:defRPr sz="1200"/>
             </a:lvl1pPr>
           </a:lstStyle>
-          <a:p>
-            <a:endParaRPr/>
-          </a:p>
+          <a:p/>
         </p:txBody>
       </p:sp>
       <p:sp>
@@ -1265,8 +1318,8 @@
             </a:lvl1pPr>
           </a:lstStyle>
           <a:p>
-            <a:r>
-              <a:rPr lang="cs-CZ"/>
+            <a:r id="{B7268E1E-0E44-426D-905E-8AD9B19D2182}" type="datetimeFigureOut">
+              <a:rPr lang="cs-CZ" smtClean="0"/>
               <a:t>1.7.2013</a:t>
             </a:r>
           </a:p>
@@ -1284,8 +1337,8 @@
         </p:nvSpPr>
         <p:spPr>
           <a:xfrm>
-            <a:off x="2290763" y="512763"/>
-            <a:ext cx="4562475" cy="2566987"/>
+            <a:off x="2857500" y="512763"/>
+            <a:ext cx="3429000" cy="2566987"/>
           </a:xfrm>
           <a:prstGeom prst="rect">
             <a:avLst/>
@@ -1300,9 +1353,7 @@
         <p:txBody>
           <a:bodyPr vert="horz" lIns="91440" tIns="45720" rIns="91440" bIns="45720" rtlCol="0" anchor="ctr"/>
           <a:lstStyle/>
-          <a:p>
-            <a:endParaRPr/>
-          </a:p>
+          <a:p/>
         </p:txBody>
       </p:sp>
       <p:sp>
@@ -1334,10 +1385,40 @@
             </a:r>
           </a:p>
           <a:p>
-            <a:endParaRPr lang="en-US"/>
-          </a:p>
-          <a:p>
-            <a:endParaRPr lang="en-US"/>
+            <a:r>
+              <a:rPr lang="en-US"/>
+              <a:t/>
+            </a:r>
+          </a:p>
+          <a:p>
+            <a:r>
+              <a:rPr lang="en-US"/>
+              <a:t>1.7.2013</a:t>
+            </a:r>
+          </a:p>
+          <a:p>
+            <a:r>
+              <a:rPr lang="en-US"/>
+              <a:t/>
+            </a:r>
+          </a:p>
+          <a:p>
+            <a:r>
+              <a:rPr lang="en-US"/>
+              <a:t/>
+            </a:r>
+          </a:p>
+          <a:p>
+            <a:r>
+              <a:rPr lang="en-US"/>
+              <a:t>‹#›</a:t>
+            </a:r>
+          </a:p>
+          <a:p>
+            <a:r>
+              <a:rPr lang="en-US"/>
+              <a:t/>
+            </a:r>
           </a:p>
           <a:p>
             <a:r>
@@ -1373,9 +1454,7 @@
               <a:defRPr sz="1200"/>
             </a:lvl1pPr>
           </a:lstStyle>
-          <a:p>
-            <a:endParaRPr/>
-          </a:p>
+          <a:p/>
         </p:txBody>
       </p:sp>
       <p:sp>
@@ -1405,8 +1484,8 @@
             </a:lvl1pPr>
           </a:lstStyle>
           <a:p>
-            <a:r>
-              <a:rPr lang="cs-CZ"/>
+            <a:r id="{871B2431-D351-4C6E-A3CF-9DFAC0E3E050}" type="slidenum">
+              <a:rPr lang="cs-CZ" smtClean="0"/>
               <a:t>‹#›</a:t>
             </a:r>
           </a:p>
@@ -1421,9 +1500,9 @@
 </file>
 
 <file path=ppt/notesSlides/notesSlide5.xml><?xml version="1.0" encoding="utf-8"?>
-<p:notes xmlns:a="http://schemas.openxmlformats.org/drawingml/2006/main" xmlns:r="http://schemas.openxmlformats.org/officeDocument/2006/relationships" xmlns:p="http://schemas.openxmlformats.org/presentationml/2006/main">
+<p:notes xmlns:p="http://schemas.openxmlformats.org/presentationml/2006/main" xmlns:a="http://schemas.openxmlformats.org/drawingml/2006/main">
   <p:cSld>
-    <p:spTree>
+    <p:spTree xmlns:r="http://schemas.openxmlformats.org/officeDocument/2006/relationships">
       <p:nvGrpSpPr>
         <p:cNvPr id="1" name=""/>
         <p:cNvGrpSpPr/>
@@ -1463,9 +1542,7 @@
               <a:defRPr sz="1200"/>
             </a:lvl1pPr>
           </a:lstStyle>
-          <a:p>
-            <a:endParaRPr/>
-          </a:p>
+          <a:p/>
         </p:txBody>
       </p:sp>
       <p:sp>
@@ -1495,8 +1572,8 @@
             </a:lvl1pPr>
           </a:lstStyle>
           <a:p>
-            <a:r>
-              <a:rPr lang="cs-CZ"/>
+            <a:r id="{B7268E1E-0E44-426D-905E-8AD9B19D2182}" type="datetimeFigureOut">
+              <a:rPr lang="cs-CZ" smtClean="0"/>
               <a:t>1.7.2013</a:t>
             </a:r>
           </a:p>
@@ -1514,8 +1591,8 @@
         </p:nvSpPr>
         <p:spPr>
           <a:xfrm>
-            <a:off x="2290763" y="512763"/>
-            <a:ext cx="4562475" cy="2566987"/>
+            <a:off x="2857500" y="512763"/>
+            <a:ext cx="3429000" cy="2566987"/>
           </a:xfrm>
           <a:prstGeom prst="rect">
             <a:avLst/>
@@ -1530,9 +1607,7 @@
         <p:txBody>
           <a:bodyPr vert="horz" lIns="91440" tIns="45720" rIns="91440" bIns="45720" rtlCol="0" anchor="ctr"/>
           <a:lstStyle/>
-          <a:p>
-            <a:endParaRPr/>
-          </a:p>
+          <a:p/>
         </p:txBody>
       </p:sp>
       <p:sp>
@@ -1564,10 +1639,40 @@
             </a:r>
           </a:p>
           <a:p>
-            <a:endParaRPr lang="en-US"/>
-          </a:p>
-          <a:p>
-            <a:endParaRPr lang="en-US"/>
+            <a:r>
+              <a:rPr lang="en-US"/>
+              <a:t/>
+            </a:r>
+          </a:p>
+          <a:p>
+            <a:r>
+              <a:rPr lang="en-US"/>
+              <a:t>1.7.2013</a:t>
+            </a:r>
+          </a:p>
+          <a:p>
+            <a:r>
+              <a:rPr lang="en-US"/>
+              <a:t/>
+            </a:r>
+          </a:p>
+          <a:p>
+            <a:r>
+              <a:rPr lang="en-US"/>
+              <a:t/>
+            </a:r>
+          </a:p>
+          <a:p>
+            <a:r>
+              <a:rPr lang="en-US"/>
+              <a:t>‹#›</a:t>
+            </a:r>
+          </a:p>
+          <a:p>
+            <a:r>
+              <a:rPr lang="en-US"/>
+              <a:t/>
+            </a:r>
           </a:p>
           <a:p>
             <a:r>
@@ -1603,9 +1708,7 @@
               <a:defRPr sz="1200"/>
             </a:lvl1pPr>
           </a:lstStyle>
-          <a:p>
-            <a:endParaRPr/>
-          </a:p>
+          <a:p/>
         </p:txBody>
       </p:sp>
       <p:sp>
@@ -1635,8 +1738,8 @@
             </a:lvl1pPr>
           </a:lstStyle>
           <a:p>
-            <a:r>
-              <a:rPr lang="cs-CZ"/>
+            <a:r id="{871B2431-D351-4C6E-A3CF-9DFAC0E3E050}" type="slidenum">
+              <a:rPr lang="cs-CZ" smtClean="0"/>
               <a:t>‹#›</a:t>
             </a:r>
           </a:p>
@@ -1651,9 +1754,9 @@
 </file>
 
 <file path=ppt/notesSlides/notesSlide6.xml><?xml version="1.0" encoding="utf-8"?>
-<p:notes xmlns:a="http://schemas.openxmlformats.org/drawingml/2006/main" xmlns:r="http://schemas.openxmlformats.org/officeDocument/2006/relationships" xmlns:p="http://schemas.openxmlformats.org/presentationml/2006/main">
+<p:notes xmlns:p="http://schemas.openxmlformats.org/presentationml/2006/main" xmlns:a="http://schemas.openxmlformats.org/drawingml/2006/main">
   <p:cSld>
-    <p:spTree>
+    <p:spTree xmlns:r="http://schemas.openxmlformats.org/officeDocument/2006/relationships">
       <p:nvGrpSpPr>
         <p:cNvPr id="1" name=""/>
         <p:cNvGrpSpPr/>
@@ -1693,9 +1796,7 @@
               <a:defRPr sz="1200"/>
             </a:lvl1pPr>
           </a:lstStyle>
-          <a:p>
-            <a:endParaRPr/>
-          </a:p>
+          <a:p/>
         </p:txBody>
       </p:sp>
       <p:sp>
@@ -1725,8 +1826,8 @@
             </a:lvl1pPr>
           </a:lstStyle>
           <a:p>
-            <a:r>
-              <a:rPr lang="cs-CZ"/>
+            <a:r id="{B7268E1E-0E44-426D-905E-8AD9B19D2182}" type="datetimeFigureOut">
+              <a:rPr lang="cs-CZ" smtClean="0"/>
               <a:t>1.7.2013</a:t>
             </a:r>
           </a:p>
@@ -1744,8 +1845,8 @@
         </p:nvSpPr>
         <p:spPr>
           <a:xfrm>
-            <a:off x="2290763" y="512763"/>
-            <a:ext cx="4562475" cy="2566987"/>
+            <a:off x="2857500" y="512763"/>
+            <a:ext cx="3429000" cy="2566987"/>
           </a:xfrm>
           <a:prstGeom prst="rect">
             <a:avLst/>
@@ -1760,9 +1861,7 @@
         <p:txBody>
           <a:bodyPr vert="horz" lIns="91440" tIns="45720" rIns="91440" bIns="45720" rtlCol="0" anchor="ctr"/>
           <a:lstStyle/>
-          <a:p>
-            <a:endParaRPr/>
-          </a:p>
+          <a:p/>
         </p:txBody>
       </p:sp>
       <p:sp>
@@ -1794,10 +1893,40 @@
             </a:r>
           </a:p>
           <a:p>
-            <a:endParaRPr lang="en-US"/>
-          </a:p>
-          <a:p>
-            <a:endParaRPr lang="en-US"/>
+            <a:r>
+              <a:rPr lang="en-US"/>
+              <a:t/>
+            </a:r>
+          </a:p>
+          <a:p>
+            <a:r>
+              <a:rPr lang="en-US"/>
+              <a:t>1.7.2013</a:t>
+            </a:r>
+          </a:p>
+          <a:p>
+            <a:r>
+              <a:rPr lang="en-US"/>
+              <a:t/>
+            </a:r>
+          </a:p>
+          <a:p>
+            <a:r>
+              <a:rPr lang="en-US"/>
+              <a:t/>
+            </a:r>
+          </a:p>
+          <a:p>
+            <a:r>
+              <a:rPr lang="en-US"/>
+              <a:t>‹#›</a:t>
+            </a:r>
+          </a:p>
+          <a:p>
+            <a:r>
+              <a:rPr lang="en-US"/>
+              <a:t/>
+            </a:r>
           </a:p>
           <a:p>
             <a:r>
@@ -1833,9 +1962,7 @@
               <a:defRPr sz="1200"/>
             </a:lvl1pPr>
           </a:lstStyle>
-          <a:p>
-            <a:endParaRPr/>
-          </a:p>
+          <a:p/>
         </p:txBody>
       </p:sp>
       <p:sp>
@@ -1865,8 +1992,8 @@
             </a:lvl1pPr>
           </a:lstStyle>
           <a:p>
-            <a:r>
-              <a:rPr lang="cs-CZ"/>
+            <a:r id="{871B2431-D351-4C6E-A3CF-9DFAC0E3E050}" type="slidenum">
+              <a:rPr lang="cs-CZ" smtClean="0"/>
               <a:t>‹#›</a:t>
             </a:r>
           </a:p>
@@ -1918,9 +2045,10 @@
           <a:lstStyle/>
           <a:p>
             <a:r>
-              <a:rPr lang="en-US"/>
+              <a:rPr lang="en-US" smtClean="0"/>
               <a:t>Click to edit Master title style</a:t>
             </a:r>
+            <a:endParaRPr lang="en-US"/>
           </a:p>
         </p:txBody>
       </p:sp>
@@ -2036,9 +2164,10 @@
           </a:lstStyle>
           <a:p>
             <a:r>
-              <a:rPr lang="en-US"/>
+              <a:rPr lang="en-US" smtClean="0"/>
               <a:t>Click to edit Master subtitle style</a:t>
             </a:r>
+            <a:endParaRPr lang="en-US"/>
           </a:p>
         </p:txBody>
       </p:sp>
@@ -2060,7 +2189,7 @@
             <a:fld id="{1D8BD707-D9CF-40AE-B4C6-C98DA3205C09}" type="datetimeFigureOut">
               <a:rPr lang="en-US" smtClean="0"/>
               <a:pPr/>
-              <a:t>6/4/2026</a:t>
+              <a:t>8/1/2011</a:t>
             </a:fld>
             <a:endParaRPr lang="en-US"/>
           </a:p>
@@ -2150,9 +2279,10 @@
           <a:lstStyle/>
           <a:p>
             <a:r>
-              <a:rPr lang="en-US"/>
+              <a:rPr lang="en-US" smtClean="0"/>
               <a:t>Click to edit Master title style</a:t>
             </a:r>
+            <a:endParaRPr lang="en-US"/>
           </a:p>
         </p:txBody>
       </p:sp>
@@ -2173,37 +2303,38 @@
           <a:p>
             <a:pPr lvl="0"/>
             <a:r>
-              <a:rPr lang="en-US"/>
+              <a:rPr lang="en-US" smtClean="0"/>
               <a:t>Click to edit Master text styles</a:t>
             </a:r>
           </a:p>
           <a:p>
             <a:pPr lvl="1"/>
             <a:r>
-              <a:rPr lang="en-US"/>
+              <a:rPr lang="en-US" smtClean="0"/>
               <a:t>Second level</a:t>
             </a:r>
           </a:p>
           <a:p>
             <a:pPr lvl="2"/>
             <a:r>
-              <a:rPr lang="en-US"/>
+              <a:rPr lang="en-US" smtClean="0"/>
               <a:t>Third level</a:t>
             </a:r>
           </a:p>
           <a:p>
             <a:pPr lvl="3"/>
             <a:r>
-              <a:rPr lang="en-US"/>
+              <a:rPr lang="en-US" smtClean="0"/>
               <a:t>Fourth level</a:t>
             </a:r>
           </a:p>
           <a:p>
             <a:pPr lvl="4"/>
             <a:r>
-              <a:rPr lang="en-US"/>
+              <a:rPr lang="en-US" smtClean="0"/>
               <a:t>Fifth level</a:t>
             </a:r>
+            <a:endParaRPr lang="en-US"/>
           </a:p>
         </p:txBody>
       </p:sp>
@@ -2225,7 +2356,7 @@
             <a:fld id="{1D8BD707-D9CF-40AE-B4C6-C98DA3205C09}" type="datetimeFigureOut">
               <a:rPr lang="en-US" smtClean="0"/>
               <a:pPr/>
-              <a:t>6/4/2026</a:t>
+              <a:t>8/1/2011</a:t>
             </a:fld>
             <a:endParaRPr lang="en-US"/>
           </a:p>
@@ -2320,9 +2451,10 @@
           <a:lstStyle/>
           <a:p>
             <a:r>
-              <a:rPr lang="en-US"/>
+              <a:rPr lang="en-US" smtClean="0"/>
               <a:t>Click to edit Master title style</a:t>
             </a:r>
+            <a:endParaRPr lang="en-US"/>
           </a:p>
         </p:txBody>
       </p:sp>
@@ -2348,37 +2480,38 @@
           <a:p>
             <a:pPr lvl="0"/>
             <a:r>
-              <a:rPr lang="en-US"/>
+              <a:rPr lang="en-US" smtClean="0"/>
               <a:t>Click to edit Master text styles</a:t>
             </a:r>
           </a:p>
           <a:p>
             <a:pPr lvl="1"/>
             <a:r>
-              <a:rPr lang="en-US"/>
+              <a:rPr lang="en-US" smtClean="0"/>
               <a:t>Second level</a:t>
             </a:r>
           </a:p>
           <a:p>
             <a:pPr lvl="2"/>
             <a:r>
-              <a:rPr lang="en-US"/>
+              <a:rPr lang="en-US" smtClean="0"/>
               <a:t>Third level</a:t>
             </a:r>
           </a:p>
           <a:p>
             <a:pPr lvl="3"/>
             <a:r>
-              <a:rPr lang="en-US"/>
+              <a:rPr lang="en-US" smtClean="0"/>
               <a:t>Fourth level</a:t>
             </a:r>
           </a:p>
           <a:p>
             <a:pPr lvl="4"/>
             <a:r>
-              <a:rPr lang="en-US"/>
+              <a:rPr lang="en-US" smtClean="0"/>
               <a:t>Fifth level</a:t>
             </a:r>
+            <a:endParaRPr lang="en-US"/>
           </a:p>
         </p:txBody>
       </p:sp>
@@ -2400,7 +2533,7 @@
             <a:fld id="{1D8BD707-D9CF-40AE-B4C6-C98DA3205C09}" type="datetimeFigureOut">
               <a:rPr lang="en-US" smtClean="0"/>
               <a:pPr/>
-              <a:t>6/4/2026</a:t>
+              <a:t>8/1/2011</a:t>
             </a:fld>
             <a:endParaRPr lang="en-US"/>
           </a:p>
@@ -2490,9 +2623,10 @@
           <a:lstStyle/>
           <a:p>
             <a:r>
-              <a:rPr lang="en-US"/>
+              <a:rPr lang="en-US" smtClean="0"/>
               <a:t>Click to edit Master title style</a:t>
             </a:r>
+            <a:endParaRPr lang="en-US"/>
           </a:p>
         </p:txBody>
       </p:sp>
@@ -2513,37 +2647,38 @@
           <a:p>
             <a:pPr lvl="0"/>
             <a:r>
-              <a:rPr lang="en-US"/>
+              <a:rPr lang="en-US" smtClean="0"/>
               <a:t>Click to edit Master text styles</a:t>
             </a:r>
           </a:p>
           <a:p>
             <a:pPr lvl="1"/>
             <a:r>
-              <a:rPr lang="en-US"/>
+              <a:rPr lang="en-US" smtClean="0"/>
               <a:t>Second level</a:t>
             </a:r>
           </a:p>
           <a:p>
             <a:pPr lvl="2"/>
             <a:r>
-              <a:rPr lang="en-US"/>
+              <a:rPr lang="en-US" smtClean="0"/>
               <a:t>Third level</a:t>
             </a:r>
           </a:p>
           <a:p>
             <a:pPr lvl="3"/>
             <a:r>
-              <a:rPr lang="en-US"/>
+              <a:rPr lang="en-US" smtClean="0"/>
               <a:t>Fourth level</a:t>
             </a:r>
           </a:p>
           <a:p>
             <a:pPr lvl="4"/>
             <a:r>
-              <a:rPr lang="en-US"/>
+              <a:rPr lang="en-US" smtClean="0"/>
               <a:t>Fifth level</a:t>
             </a:r>
+            <a:endParaRPr lang="en-US"/>
           </a:p>
         </p:txBody>
       </p:sp>
@@ -2565,7 +2700,7 @@
             <a:fld id="{1D8BD707-D9CF-40AE-B4C6-C98DA3205C09}" type="datetimeFigureOut">
               <a:rPr lang="en-US" smtClean="0"/>
               <a:pPr/>
-              <a:t>6/4/2026</a:t>
+              <a:t>8/1/2011</a:t>
             </a:fld>
             <a:endParaRPr lang="en-US"/>
           </a:p>
@@ -2664,9 +2799,10 @@
           </a:lstStyle>
           <a:p>
             <a:r>
-              <a:rPr lang="en-US"/>
+              <a:rPr lang="en-US" smtClean="0"/>
               <a:t>Click to edit Master title style</a:t>
             </a:r>
+            <a:endParaRPr lang="en-US"/>
           </a:p>
         </p:txBody>
       </p:sp>
@@ -2783,7 +2919,7 @@
           <a:p>
             <a:pPr lvl="0"/>
             <a:r>
-              <a:rPr lang="en-US"/>
+              <a:rPr lang="en-US" smtClean="0"/>
               <a:t>Click to edit Master text styles</a:t>
             </a:r>
           </a:p>
@@ -2807,7 +2943,7 @@
             <a:fld id="{1D8BD707-D9CF-40AE-B4C6-C98DA3205C09}" type="datetimeFigureOut">
               <a:rPr lang="en-US" smtClean="0"/>
               <a:pPr/>
-              <a:t>6/4/2026</a:t>
+              <a:t>8/1/2011</a:t>
             </a:fld>
             <a:endParaRPr lang="en-US"/>
           </a:p>
@@ -2897,9 +3033,10 @@
           <a:lstStyle/>
           <a:p>
             <a:r>
-              <a:rPr lang="en-US"/>
+              <a:rPr lang="en-US" smtClean="0"/>
               <a:t>Click to edit Master title style</a:t>
             </a:r>
+            <a:endParaRPr lang="en-US"/>
           </a:p>
         </p:txBody>
       </p:sp>
@@ -2953,37 +3090,38 @@
           <a:p>
             <a:pPr lvl="0"/>
             <a:r>
-              <a:rPr lang="en-US"/>
+              <a:rPr lang="en-US" smtClean="0"/>
               <a:t>Click to edit Master text styles</a:t>
             </a:r>
           </a:p>
           <a:p>
             <a:pPr lvl="1"/>
             <a:r>
-              <a:rPr lang="en-US"/>
+              <a:rPr lang="en-US" smtClean="0"/>
               <a:t>Second level</a:t>
             </a:r>
           </a:p>
           <a:p>
             <a:pPr lvl="2"/>
             <a:r>
-              <a:rPr lang="en-US"/>
+              <a:rPr lang="en-US" smtClean="0"/>
               <a:t>Third level</a:t>
             </a:r>
           </a:p>
           <a:p>
             <a:pPr lvl="3"/>
             <a:r>
-              <a:rPr lang="en-US"/>
+              <a:rPr lang="en-US" smtClean="0"/>
               <a:t>Fourth level</a:t>
             </a:r>
           </a:p>
           <a:p>
             <a:pPr lvl="4"/>
             <a:r>
-              <a:rPr lang="en-US"/>
+              <a:rPr lang="en-US" smtClean="0"/>
               <a:t>Fifth level</a:t>
             </a:r>
+            <a:endParaRPr lang="en-US"/>
           </a:p>
         </p:txBody>
       </p:sp>
@@ -3037,37 +3175,38 @@
           <a:p>
             <a:pPr lvl="0"/>
             <a:r>
-              <a:rPr lang="en-US"/>
+              <a:rPr lang="en-US" smtClean="0"/>
               <a:t>Click to edit Master text styles</a:t>
             </a:r>
           </a:p>
           <a:p>
             <a:pPr lvl="1"/>
             <a:r>
-              <a:rPr lang="en-US"/>
+              <a:rPr lang="en-US" smtClean="0"/>
               <a:t>Second level</a:t>
             </a:r>
           </a:p>
           <a:p>
             <a:pPr lvl="2"/>
             <a:r>
-              <a:rPr lang="en-US"/>
+              <a:rPr lang="en-US" smtClean="0"/>
               <a:t>Third level</a:t>
             </a:r>
           </a:p>
           <a:p>
             <a:pPr lvl="3"/>
             <a:r>
-              <a:rPr lang="en-US"/>
+              <a:rPr lang="en-US" smtClean="0"/>
               <a:t>Fourth level</a:t>
             </a:r>
           </a:p>
           <a:p>
             <a:pPr lvl="4"/>
             <a:r>
-              <a:rPr lang="en-US"/>
+              <a:rPr lang="en-US" smtClean="0"/>
               <a:t>Fifth level</a:t>
             </a:r>
+            <a:endParaRPr lang="en-US"/>
           </a:p>
         </p:txBody>
       </p:sp>
@@ -3089,7 +3228,7 @@
             <a:fld id="{1D8BD707-D9CF-40AE-B4C6-C98DA3205C09}" type="datetimeFigureOut">
               <a:rPr lang="en-US" smtClean="0"/>
               <a:pPr/>
-              <a:t>6/4/2026</a:t>
+              <a:t>8/1/2011</a:t>
             </a:fld>
             <a:endParaRPr lang="en-US"/>
           </a:p>
@@ -3183,9 +3322,10 @@
           </a:lstStyle>
           <a:p>
             <a:r>
-              <a:rPr lang="en-US"/>
+              <a:rPr lang="en-US" smtClean="0"/>
               <a:t>Click to edit Master title style</a:t>
             </a:r>
+            <a:endParaRPr lang="en-US"/>
           </a:p>
         </p:txBody>
       </p:sp>
@@ -3248,7 +3388,7 @@
           <a:p>
             <a:pPr lvl="0"/>
             <a:r>
-              <a:rPr lang="en-US"/>
+              <a:rPr lang="en-US" smtClean="0"/>
               <a:t>Click to edit Master text styles</a:t>
             </a:r>
           </a:p>
@@ -3304,37 +3444,38 @@
           <a:p>
             <a:pPr lvl="0"/>
             <a:r>
-              <a:rPr lang="en-US"/>
+              <a:rPr lang="en-US" smtClean="0"/>
               <a:t>Click to edit Master text styles</a:t>
             </a:r>
           </a:p>
           <a:p>
             <a:pPr lvl="1"/>
             <a:r>
-              <a:rPr lang="en-US"/>
+              <a:rPr lang="en-US" smtClean="0"/>
               <a:t>Second level</a:t>
             </a:r>
           </a:p>
           <a:p>
             <a:pPr lvl="2"/>
             <a:r>
-              <a:rPr lang="en-US"/>
+              <a:rPr lang="en-US" smtClean="0"/>
               <a:t>Third level</a:t>
             </a:r>
           </a:p>
           <a:p>
             <a:pPr lvl="3"/>
             <a:r>
-              <a:rPr lang="en-US"/>
+              <a:rPr lang="en-US" smtClean="0"/>
               <a:t>Fourth level</a:t>
             </a:r>
           </a:p>
           <a:p>
             <a:pPr lvl="4"/>
             <a:r>
-              <a:rPr lang="en-US"/>
+              <a:rPr lang="en-US" smtClean="0"/>
               <a:t>Fifth level</a:t>
             </a:r>
+            <a:endParaRPr lang="en-US"/>
           </a:p>
         </p:txBody>
       </p:sp>
@@ -3397,7 +3538,7 @@
           <a:p>
             <a:pPr lvl="0"/>
             <a:r>
-              <a:rPr lang="en-US"/>
+              <a:rPr lang="en-US" smtClean="0"/>
               <a:t>Click to edit Master text styles</a:t>
             </a:r>
           </a:p>
@@ -3453,37 +3594,38 @@
           <a:p>
             <a:pPr lvl="0"/>
             <a:r>
-              <a:rPr lang="en-US"/>
+              <a:rPr lang="en-US" smtClean="0"/>
               <a:t>Click to edit Master text styles</a:t>
             </a:r>
           </a:p>
           <a:p>
             <a:pPr lvl="1"/>
             <a:r>
-              <a:rPr lang="en-US"/>
+              <a:rPr lang="en-US" smtClean="0"/>
               <a:t>Second level</a:t>
             </a:r>
           </a:p>
           <a:p>
             <a:pPr lvl="2"/>
             <a:r>
-              <a:rPr lang="en-US"/>
+              <a:rPr lang="en-US" smtClean="0"/>
               <a:t>Third level</a:t>
             </a:r>
           </a:p>
           <a:p>
             <a:pPr lvl="3"/>
             <a:r>
-              <a:rPr lang="en-US"/>
+              <a:rPr lang="en-US" smtClean="0"/>
               <a:t>Fourth level</a:t>
             </a:r>
           </a:p>
           <a:p>
             <a:pPr lvl="4"/>
             <a:r>
-              <a:rPr lang="en-US"/>
+              <a:rPr lang="en-US" smtClean="0"/>
               <a:t>Fifth level</a:t>
             </a:r>
+            <a:endParaRPr lang="en-US"/>
           </a:p>
         </p:txBody>
       </p:sp>
@@ -3505,7 +3647,7 @@
             <a:fld id="{1D8BD707-D9CF-40AE-B4C6-C98DA3205C09}" type="datetimeFigureOut">
               <a:rPr lang="en-US" smtClean="0"/>
               <a:pPr/>
-              <a:t>6/4/2026</a:t>
+              <a:t>8/1/2011</a:t>
             </a:fld>
             <a:endParaRPr lang="en-US"/>
           </a:p>
@@ -3595,9 +3737,10 @@
           <a:lstStyle/>
           <a:p>
             <a:r>
-              <a:rPr lang="en-US"/>
+              <a:rPr lang="en-US" smtClean="0"/>
               <a:t>Click to edit Master title style</a:t>
             </a:r>
+            <a:endParaRPr lang="en-US"/>
           </a:p>
         </p:txBody>
       </p:sp>
@@ -3619,7 +3762,7 @@
             <a:fld id="{1D8BD707-D9CF-40AE-B4C6-C98DA3205C09}" type="datetimeFigureOut">
               <a:rPr lang="en-US" smtClean="0"/>
               <a:pPr/>
-              <a:t>6/4/2026</a:t>
+              <a:t>8/1/2011</a:t>
             </a:fld>
             <a:endParaRPr lang="en-US"/>
           </a:p>
@@ -3711,7 +3854,7 @@
             <a:fld id="{1D8BD707-D9CF-40AE-B4C6-C98DA3205C09}" type="datetimeFigureOut">
               <a:rPr lang="en-US" smtClean="0"/>
               <a:pPr/>
-              <a:t>6/4/2026</a:t>
+              <a:t>8/1/2011</a:t>
             </a:fld>
             <a:endParaRPr lang="en-US"/>
           </a:p>
@@ -3810,9 +3953,10 @@
           </a:lstStyle>
           <a:p>
             <a:r>
-              <a:rPr lang="en-US"/>
+              <a:rPr lang="en-US" smtClean="0"/>
               <a:t>Click to edit Master title style</a:t>
             </a:r>
+            <a:endParaRPr lang="en-US"/>
           </a:p>
         </p:txBody>
       </p:sp>
@@ -3866,37 +4010,38 @@
           <a:p>
             <a:pPr lvl="0"/>
             <a:r>
-              <a:rPr lang="en-US"/>
+              <a:rPr lang="en-US" smtClean="0"/>
               <a:t>Click to edit Master text styles</a:t>
             </a:r>
           </a:p>
           <a:p>
             <a:pPr lvl="1"/>
             <a:r>
-              <a:rPr lang="en-US"/>
+              <a:rPr lang="en-US" smtClean="0"/>
               <a:t>Second level</a:t>
             </a:r>
           </a:p>
           <a:p>
             <a:pPr lvl="2"/>
             <a:r>
-              <a:rPr lang="en-US"/>
+              <a:rPr lang="en-US" smtClean="0"/>
               <a:t>Third level</a:t>
             </a:r>
           </a:p>
           <a:p>
             <a:pPr lvl="3"/>
             <a:r>
-              <a:rPr lang="en-US"/>
+              <a:rPr lang="en-US" smtClean="0"/>
               <a:t>Fourth level</a:t>
             </a:r>
           </a:p>
           <a:p>
             <a:pPr lvl="4"/>
             <a:r>
-              <a:rPr lang="en-US"/>
+              <a:rPr lang="en-US" smtClean="0"/>
               <a:t>Fifth level</a:t>
             </a:r>
+            <a:endParaRPr lang="en-US"/>
           </a:p>
         </p:txBody>
       </p:sp>
@@ -3959,7 +4104,7 @@
           <a:p>
             <a:pPr lvl="0"/>
             <a:r>
-              <a:rPr lang="en-US"/>
+              <a:rPr lang="en-US" smtClean="0"/>
               <a:t>Click to edit Master text styles</a:t>
             </a:r>
           </a:p>
@@ -3983,7 +4128,7 @@
             <a:fld id="{1D8BD707-D9CF-40AE-B4C6-C98DA3205C09}" type="datetimeFigureOut">
               <a:rPr lang="en-US" smtClean="0"/>
               <a:pPr/>
-              <a:t>6/4/2026</a:t>
+              <a:t>8/1/2011</a:t>
             </a:fld>
             <a:endParaRPr lang="en-US"/>
           </a:p>
@@ -4082,9 +4227,10 @@
           </a:lstStyle>
           <a:p>
             <a:r>
-              <a:rPr lang="en-US"/>
+              <a:rPr lang="en-US" smtClean="0"/>
               <a:t>Click to edit Master title style</a:t>
             </a:r>
+            <a:endParaRPr lang="en-US"/>
           </a:p>
         </p:txBody>
       </p:sp>
@@ -4208,7 +4354,7 @@
           <a:p>
             <a:pPr lvl="0"/>
             <a:r>
-              <a:rPr lang="en-US"/>
+              <a:rPr lang="en-US" smtClean="0"/>
               <a:t>Click to edit Master text styles</a:t>
             </a:r>
           </a:p>
@@ -4232,7 +4378,7 @@
             <a:fld id="{1D8BD707-D9CF-40AE-B4C6-C98DA3205C09}" type="datetimeFigureOut">
               <a:rPr lang="en-US" smtClean="0"/>
               <a:pPr/>
-              <a:t>6/4/2026</a:t>
+              <a:t>8/1/2011</a:t>
             </a:fld>
             <a:endParaRPr lang="en-US"/>
           </a:p>
@@ -4337,9 +4483,10 @@
           <a:lstStyle/>
           <a:p>
             <a:r>
-              <a:rPr lang="en-US"/>
+              <a:rPr lang="en-US" smtClean="0"/>
               <a:t>Click to edit Master title style</a:t>
             </a:r>
+            <a:endParaRPr lang="en-US"/>
           </a:p>
         </p:txBody>
       </p:sp>
@@ -4370,37 +4517,38 @@
           <a:p>
             <a:pPr lvl="0"/>
             <a:r>
-              <a:rPr lang="en-US"/>
+              <a:rPr lang="en-US" smtClean="0"/>
               <a:t>Click to edit Master text styles</a:t>
             </a:r>
           </a:p>
           <a:p>
             <a:pPr lvl="1"/>
             <a:r>
-              <a:rPr lang="en-US"/>
+              <a:rPr lang="en-US" smtClean="0"/>
               <a:t>Second level</a:t>
             </a:r>
           </a:p>
           <a:p>
             <a:pPr lvl="2"/>
             <a:r>
-              <a:rPr lang="en-US"/>
+              <a:rPr lang="en-US" smtClean="0"/>
               <a:t>Third level</a:t>
             </a:r>
           </a:p>
           <a:p>
             <a:pPr lvl="3"/>
             <a:r>
-              <a:rPr lang="en-US"/>
+              <a:rPr lang="en-US" smtClean="0"/>
               <a:t>Fourth level</a:t>
             </a:r>
           </a:p>
           <a:p>
             <a:pPr lvl="4"/>
             <a:r>
-              <a:rPr lang="en-US"/>
+              <a:rPr lang="en-US" smtClean="0"/>
               <a:t>Fifth level</a:t>
             </a:r>
+            <a:endParaRPr lang="en-US"/>
           </a:p>
         </p:txBody>
       </p:sp>
@@ -4440,7 +4588,7 @@
             <a:fld id="{1D8BD707-D9CF-40AE-B4C6-C98DA3205C09}" type="datetimeFigureOut">
               <a:rPr lang="en-US" smtClean="0"/>
               <a:pPr/>
-              <a:t>6/4/2026</a:t>
+              <a:t>8/1/2011</a:t>
             </a:fld>
             <a:endParaRPr lang="en-US"/>
           </a:p>
@@ -4795,7 +4943,7 @@
 </file>
 
 <file path=ppt/slides/slide1.xml><?xml version="1.0" encoding="utf-8"?>
-<p:sld xmlns:a="http://schemas.openxmlformats.org/drawingml/2006/main" xmlns:r="http://schemas.openxmlformats.org/officeDocument/2006/relationships" xmlns:p="http://schemas.openxmlformats.org/presentationml/2006/main">
+<p:sld xmlns:p="http://schemas.openxmlformats.org/presentationml/2006/main" xmlns:a="http://schemas.openxmlformats.org/drawingml/2006/main" xmlns:r="http://schemas.openxmlformats.org/officeDocument/2006/relationships">
   <p:cSld>
     <p:spTree>
       <p:nvGrpSpPr>
@@ -4813,182 +4961,72 @@
       </p:grpSpPr>
       <p:sp>
         <p:nvSpPr>
-          <p:cNvPr id="2" name="TextBox 2"/>
-          <p:cNvSpPr txBox="1"/>
+          <p:cNvPr name="Freeform 2" id="2"/>
+          <p:cNvSpPr/>
           <p:nvPr/>
         </p:nvSpPr>
         <p:spPr>
-          <a:xfrm>
-            <a:off x="2454843" y="3549244"/>
-            <a:ext cx="14386127" cy="4388728"/>
-          </a:xfrm>
-          <a:prstGeom prst="rect">
+          <a:xfrm flipH="false" flipV="false" rot="0">
+            <a:off x="0" y="0"/>
+            <a:ext cx="18288000" cy="10287000"/>
+          </a:xfrm>
+          <a:custGeom>
             <a:avLst/>
-          </a:prstGeom>
-        </p:spPr>
-        <p:txBody>
-          <a:bodyPr lIns="0" tIns="0" rIns="0" bIns="0" rtlCol="0" anchor="t">
-            <a:spAutoFit/>
-          </a:bodyPr>
-          <a:lstStyle/>
-          <a:p>
-            <a:pPr algn="l">
-              <a:lnSpc>
-                <a:spcPts val="4472"/>
-              </a:lnSpc>
-            </a:pPr>
-            <a:endParaRPr/>
-          </a:p>
-          <a:p>
-            <a:pPr algn="just">
-              <a:lnSpc>
-                <a:spcPts val="4313"/>
-              </a:lnSpc>
-            </a:pPr>
-            <a:r>
-              <a:rPr lang="en-US" sz="3451">
-                <a:solidFill>
-                  <a:srgbClr val="0B533D"/>
-                </a:solidFill>
-                <a:latin typeface="Cambria"/>
-                <a:ea typeface="Cambria"/>
-                <a:cs typeface="Cambria"/>
-                <a:sym typeface="Cambria"/>
-              </a:rPr>
-              <a:t>Problem Statement Title: </a:t>
-            </a:r>
-          </a:p>
-          <a:p>
-            <a:pPr algn="just">
-              <a:lnSpc>
-                <a:spcPts val="4313"/>
-              </a:lnSpc>
-            </a:pPr>
-            <a:endParaRPr lang="en-US" sz="3451">
-              <a:solidFill>
-                <a:srgbClr val="0B533D"/>
-              </a:solidFill>
-              <a:latin typeface="Cambria"/>
-              <a:ea typeface="Cambria"/>
-              <a:cs typeface="Cambria"/>
-              <a:sym typeface="Cambria"/>
-            </a:endParaRPr>
-          </a:p>
-          <a:p>
-            <a:pPr algn="just">
-              <a:lnSpc>
-                <a:spcPts val="4313"/>
-              </a:lnSpc>
-            </a:pPr>
-            <a:r>
-              <a:rPr lang="en-US" sz="3451">
-                <a:solidFill>
-                  <a:srgbClr val="0B533D"/>
-                </a:solidFill>
-                <a:latin typeface="Cambria"/>
-                <a:ea typeface="Cambria"/>
-                <a:cs typeface="Cambria"/>
-                <a:sym typeface="Cambria"/>
-              </a:rPr>
-              <a:t>Team Name: </a:t>
-            </a:r>
-          </a:p>
-          <a:p>
-            <a:pPr algn="just">
-              <a:lnSpc>
-                <a:spcPts val="4313"/>
-              </a:lnSpc>
-            </a:pPr>
-            <a:endParaRPr lang="en-US" sz="3451">
-              <a:solidFill>
-                <a:srgbClr val="0B533D"/>
-              </a:solidFill>
-              <a:latin typeface="Cambria"/>
-              <a:ea typeface="Cambria"/>
-              <a:cs typeface="Cambria"/>
-              <a:sym typeface="Cambria"/>
-            </a:endParaRPr>
-          </a:p>
-          <a:p>
-            <a:pPr algn="l">
-              <a:lnSpc>
-                <a:spcPts val="4472"/>
-              </a:lnSpc>
-            </a:pPr>
-            <a:r>
-              <a:rPr lang="en-US" sz="3451">
-                <a:solidFill>
-                  <a:srgbClr val="0B533D"/>
-                </a:solidFill>
-                <a:latin typeface="Cambria"/>
-                <a:ea typeface="Cambria"/>
-                <a:cs typeface="Cambria"/>
-                <a:sym typeface="Cambria"/>
-              </a:rPr>
-              <a:t>Team Leader Name: </a:t>
-            </a:r>
-          </a:p>
-          <a:p>
-            <a:pPr algn="l">
-              <a:lnSpc>
-                <a:spcPts val="4472"/>
-              </a:lnSpc>
-            </a:pPr>
-            <a:endParaRPr lang="en-US" sz="3451">
-              <a:solidFill>
-                <a:srgbClr val="0B533D"/>
-              </a:solidFill>
-              <a:latin typeface="Cambria"/>
-              <a:ea typeface="Cambria"/>
-              <a:cs typeface="Cambria"/>
-              <a:sym typeface="Cambria"/>
-            </a:endParaRPr>
-          </a:p>
-          <a:p>
-            <a:pPr algn="l">
-              <a:lnSpc>
-                <a:spcPts val="4472"/>
-              </a:lnSpc>
-            </a:pPr>
-            <a:r>
-              <a:rPr lang="en-US" sz="3451">
-                <a:solidFill>
-                  <a:srgbClr val="0B533D"/>
-                </a:solidFill>
-                <a:latin typeface="Cambria"/>
-                <a:ea typeface="Cambria"/>
-                <a:cs typeface="Cambria"/>
-                <a:sym typeface="Cambria"/>
-              </a:rPr>
-              <a:t>Institute Name: </a:t>
-            </a:r>
-          </a:p>
-        </p:txBody>
+            <a:gdLst/>
+            <a:ahLst/>
+            <a:cxnLst/>
+            <a:rect r="r" b="b" t="t" l="l"/>
+            <a:pathLst>
+              <a:path h="10287000" w="18288000">
+                <a:moveTo>
+                  <a:pt x="0" y="0"/>
+                </a:moveTo>
+                <a:lnTo>
+                  <a:pt x="18288000" y="0"/>
+                </a:lnTo>
+                <a:lnTo>
+                  <a:pt x="18288000" y="10287000"/>
+                </a:lnTo>
+                <a:lnTo>
+                  <a:pt x="0" y="10287000"/>
+                </a:lnTo>
+                <a:lnTo>
+                  <a:pt x="0" y="0"/>
+                </a:lnTo>
+                <a:close/>
+              </a:path>
+            </a:pathLst>
+          </a:custGeom>
+          <a:blipFill>
+            <a:blip r:embed="rId3"/>
+            <a:stretch>
+              <a:fillRect l="0" t="0" r="0" b="0"/>
+            </a:stretch>
+          </a:blipFill>
+        </p:spPr>
       </p:sp>
       <p:grpSp>
         <p:nvGrpSpPr>
-          <p:cNvPr id="3" name="Group 3"/>
-          <p:cNvGrpSpPr>
-            <a:grpSpLocks noChangeAspect="1"/>
-          </p:cNvGrpSpPr>
+          <p:cNvPr name="Group 3" id="3"/>
+          <p:cNvGrpSpPr/>
           <p:nvPr/>
         </p:nvGrpSpPr>
         <p:grpSpPr>
-          <a:xfrm>
-            <a:off x="5409211" y="509368"/>
-            <a:ext cx="3382175" cy="1375975"/>
+          <a:xfrm rot="0">
+            <a:off x="5409209" y="509368"/>
+            <a:ext cx="3382137" cy="1375982"/>
             <a:chOff x="0" y="0"/>
-            <a:chExt cx="4509567" cy="1834633"/>
+            <a:chExt cx="4509516" cy="1834642"/>
           </a:xfrm>
         </p:grpSpPr>
         <p:sp>
           <p:nvSpPr>
-            <p:cNvPr id="4" name="Freeform 4"/>
+            <p:cNvPr name="Freeform 4" id="4"/>
             <p:cNvSpPr/>
             <p:nvPr/>
           </p:nvSpPr>
           <p:spPr>
-            <a:xfrm>
+            <a:xfrm flipH="false" flipV="false" rot="0">
               <a:off x="0" y="0"/>
               <a:ext cx="4509516" cy="1834642"/>
             </a:xfrm>
@@ -4997,9 +5035,9 @@
               <a:gdLst/>
               <a:ahLst/>
               <a:cxnLst/>
-              <a:rect l="l" t="t" r="r" b="b"/>
+              <a:rect r="r" b="b" t="t" l="l"/>
               <a:pathLst>
-                <a:path w="4509516" h="1834642">
+                <a:path h="1834642" w="4509516">
                   <a:moveTo>
                     <a:pt x="0" y="0"/>
                   </a:moveTo>
@@ -5020,44 +5058,227 @@
               </a:pathLst>
             </a:custGeom>
             <a:blipFill>
-              <a:blip r:embed="rId3"/>
+              <a:blip r:embed="rId4"/>
               <a:stretch>
-                <a:fillRect l="-8089" t="-85592" r="-1" b="-80091"/>
+                <a:fillRect l="0" t="-72899" r="0" b="-72899"/>
               </a:stretch>
             </a:blipFill>
           </p:spPr>
         </p:sp>
       </p:grpSp>
-      <p:sp>
-        <p:nvSpPr>
-          <p:cNvPr id="11" name="Freeform 11"/>
+      <p:grpSp>
+        <p:nvGrpSpPr>
+          <p:cNvPr name="Group 5" id="5"/>
+          <p:cNvGrpSpPr/>
+          <p:nvPr/>
+        </p:nvGrpSpPr>
+        <p:grpSpPr>
+          <a:xfrm rot="0">
+            <a:off x="649738" y="537277"/>
+            <a:ext cx="4337314" cy="1320165"/>
+            <a:chOff x="0" y="0"/>
+            <a:chExt cx="5783085" cy="1760220"/>
+          </a:xfrm>
+        </p:grpSpPr>
+        <p:sp>
+          <p:nvSpPr>
+            <p:cNvPr name="Freeform 6" id="6"/>
+            <p:cNvSpPr/>
+            <p:nvPr/>
+          </p:nvSpPr>
+          <p:spPr>
+            <a:xfrm flipH="false" flipV="false" rot="0">
+              <a:off x="0" y="0"/>
+              <a:ext cx="5783072" cy="1760220"/>
+            </a:xfrm>
+            <a:custGeom>
+              <a:avLst/>
+              <a:gdLst/>
+              <a:ahLst/>
+              <a:cxnLst/>
+              <a:rect r="r" b="b" t="t" l="l"/>
+              <a:pathLst>
+                <a:path h="1760220" w="5783072">
+                  <a:moveTo>
+                    <a:pt x="0" y="0"/>
+                  </a:moveTo>
+                  <a:lnTo>
+                    <a:pt x="5783072" y="0"/>
+                  </a:lnTo>
+                  <a:lnTo>
+                    <a:pt x="5783072" y="1760220"/>
+                  </a:lnTo>
+                  <a:lnTo>
+                    <a:pt x="0" y="1760220"/>
+                  </a:lnTo>
+                  <a:lnTo>
+                    <a:pt x="0" y="0"/>
+                  </a:lnTo>
+                  <a:close/>
+                </a:path>
+              </a:pathLst>
+            </a:custGeom>
+            <a:blipFill>
+              <a:blip r:embed="rId5"/>
+              <a:stretch>
+                <a:fillRect l="-729" t="0" r="-729" b="0"/>
+              </a:stretch>
+            </a:blipFill>
+          </p:spPr>
+        </p:sp>
+      </p:grpSp>
+      <p:grpSp>
+        <p:nvGrpSpPr>
+          <p:cNvPr name="Group 7" id="7"/>
+          <p:cNvGrpSpPr/>
+          <p:nvPr/>
+        </p:nvGrpSpPr>
+        <p:grpSpPr>
+          <a:xfrm rot="0">
+            <a:off x="9057056" y="702888"/>
+            <a:ext cx="4510126" cy="988933"/>
+            <a:chOff x="0" y="0"/>
+            <a:chExt cx="6013501" cy="1318578"/>
+          </a:xfrm>
+        </p:grpSpPr>
+        <p:sp>
+          <p:nvSpPr>
+            <p:cNvPr name="Freeform 8" id="8"/>
+            <p:cNvSpPr/>
+            <p:nvPr/>
+          </p:nvSpPr>
+          <p:spPr>
+            <a:xfrm flipH="false" flipV="false" rot="0">
+              <a:off x="0" y="0"/>
+              <a:ext cx="6013450" cy="1318514"/>
+            </a:xfrm>
+            <a:custGeom>
+              <a:avLst/>
+              <a:gdLst/>
+              <a:ahLst/>
+              <a:cxnLst/>
+              <a:rect r="r" b="b" t="t" l="l"/>
+              <a:pathLst>
+                <a:path h="1318514" w="6013450">
+                  <a:moveTo>
+                    <a:pt x="0" y="0"/>
+                  </a:moveTo>
+                  <a:lnTo>
+                    <a:pt x="6013450" y="0"/>
+                  </a:lnTo>
+                  <a:lnTo>
+                    <a:pt x="6013450" y="1318514"/>
+                  </a:lnTo>
+                  <a:lnTo>
+                    <a:pt x="0" y="1318514"/>
+                  </a:lnTo>
+                  <a:lnTo>
+                    <a:pt x="0" y="0"/>
+                  </a:lnTo>
+                  <a:close/>
+                </a:path>
+              </a:pathLst>
+            </a:custGeom>
+            <a:blipFill>
+              <a:blip r:embed="rId6"/>
+              <a:stretch>
+                <a:fillRect l="0" t="0" r="0" b="-4"/>
+              </a:stretch>
+            </a:blipFill>
+          </p:spPr>
+        </p:sp>
+      </p:grpSp>
+      <p:grpSp>
+        <p:nvGrpSpPr>
+          <p:cNvPr name="Group 9" id="9"/>
+          <p:cNvGrpSpPr/>
+          <p:nvPr/>
+        </p:nvGrpSpPr>
+        <p:grpSpPr>
+          <a:xfrm rot="0">
+            <a:off x="13820003" y="526933"/>
+            <a:ext cx="4220718" cy="1547222"/>
+            <a:chOff x="0" y="0"/>
+            <a:chExt cx="5627624" cy="2062963"/>
+          </a:xfrm>
+        </p:grpSpPr>
+        <p:sp>
+          <p:nvSpPr>
+            <p:cNvPr name="Freeform 10" id="10"/>
+            <p:cNvSpPr/>
+            <p:nvPr/>
+          </p:nvSpPr>
+          <p:spPr>
+            <a:xfrm flipH="false" flipV="false" rot="0">
+              <a:off x="0" y="0"/>
+              <a:ext cx="5627624" cy="2062988"/>
+            </a:xfrm>
+            <a:custGeom>
+              <a:avLst/>
+              <a:gdLst/>
+              <a:ahLst/>
+              <a:cxnLst/>
+              <a:rect r="r" b="b" t="t" l="l"/>
+              <a:pathLst>
+                <a:path h="2062988" w="5627624">
+                  <a:moveTo>
+                    <a:pt x="0" y="0"/>
+                  </a:moveTo>
+                  <a:lnTo>
+                    <a:pt x="5627624" y="0"/>
+                  </a:lnTo>
+                  <a:lnTo>
+                    <a:pt x="5627624" y="2062988"/>
+                  </a:lnTo>
+                  <a:lnTo>
+                    <a:pt x="0" y="2062988"/>
+                  </a:lnTo>
+                  <a:lnTo>
+                    <a:pt x="0" y="0"/>
+                  </a:lnTo>
+                  <a:close/>
+                </a:path>
+              </a:pathLst>
+            </a:custGeom>
+            <a:blipFill>
+              <a:blip r:embed="rId7"/>
+              <a:stretch>
+                <a:fillRect l="0" t="0" r="0" b="1"/>
+              </a:stretch>
+            </a:blipFill>
+          </p:spPr>
+        </p:sp>
+      </p:grpSp>
+      <p:sp>
+        <p:nvSpPr>
+          <p:cNvPr name="Freeform 11" id="11"/>
           <p:cNvSpPr/>
           <p:nvPr/>
         </p:nvSpPr>
         <p:spPr>
-          <a:xfrm>
-            <a:off x="649738" y="537273"/>
-            <a:ext cx="4337309" cy="1320168"/>
+          <a:xfrm flipH="false" flipV="false" rot="-1134415">
+            <a:off x="324660" y="2398814"/>
+            <a:ext cx="2404192" cy="2404192"/>
           </a:xfrm>
           <a:custGeom>
             <a:avLst/>
             <a:gdLst/>
             <a:ahLst/>
             <a:cxnLst/>
-            <a:rect l="l" t="t" r="r" b="b"/>
+            <a:rect r="r" b="b" t="t" l="l"/>
             <a:pathLst>
-              <a:path w="4337309" h="1320168">
+              <a:path h="2404192" w="2404192">
                 <a:moveTo>
                   <a:pt x="0" y="0"/>
                 </a:moveTo>
                 <a:lnTo>
-                  <a:pt x="4337309" y="0"/>
+                  <a:pt x="2404192" y="0"/>
                 </a:lnTo>
                 <a:lnTo>
-                  <a:pt x="4337309" y="1320168"/>
+                  <a:pt x="2404192" y="2404193"/>
                 </a:lnTo>
                 <a:lnTo>
-                  <a:pt x="0" y="1320168"/>
+                  <a:pt x="0" y="2404193"/>
                 </a:lnTo>
                 <a:lnTo>
                   <a:pt x="0" y="0"/>
@@ -5067,165 +5288,1145 @@
             </a:pathLst>
           </a:custGeom>
           <a:blipFill>
-            <a:blip r:embed="rId4"/>
+            <a:blip r:embed="rId8"/>
             <a:stretch>
-              <a:fillRect/>
+              <a:fillRect l="0" t="0" r="0" b="0"/>
             </a:stretch>
           </a:blipFill>
         </p:spPr>
       </p:sp>
+      <p:sp>
+        <p:nvSpPr>
+          <p:cNvPr name="Freeform 12" id="12"/>
+          <p:cNvSpPr/>
+          <p:nvPr/>
+        </p:nvSpPr>
+        <p:spPr>
+          <a:xfrm flipH="false" flipV="false" rot="0">
+            <a:off x="16262600" y="2577575"/>
+            <a:ext cx="1495512" cy="1328984"/>
+          </a:xfrm>
+          <a:custGeom>
+            <a:avLst/>
+            <a:gdLst/>
+            <a:ahLst/>
+            <a:cxnLst/>
+            <a:rect r="r" b="b" t="t" l="l"/>
+            <a:pathLst>
+              <a:path h="1328984" w="1495512">
+                <a:moveTo>
+                  <a:pt x="0" y="0"/>
+                </a:moveTo>
+                <a:lnTo>
+                  <a:pt x="1495512" y="0"/>
+                </a:lnTo>
+                <a:lnTo>
+                  <a:pt x="1495512" y="1328985"/>
+                </a:lnTo>
+                <a:lnTo>
+                  <a:pt x="0" y="1328985"/>
+                </a:lnTo>
+                <a:lnTo>
+                  <a:pt x="0" y="0"/>
+                </a:lnTo>
+                <a:close/>
+              </a:path>
+            </a:pathLst>
+          </a:custGeom>
+          <a:blipFill>
+            <a:blip r:embed="rId9">
+              <a:extLst>
+                <a:ext uri="{96DAC541-7B7A-43D3-8B79-37D633B846F1}">
+                  <asvg:svgBlip xmlns:asvg="http://schemas.microsoft.com/office/drawing/2016/SVG/main" r:embed="rId10"/>
+                </a:ext>
+              </a:extLst>
+            </a:blip>
+            <a:stretch>
+              <a:fillRect l="-13975" t="-29197" r="0" b="0"/>
+            </a:stretch>
+          </a:blipFill>
+          <a:ln cap="sq">
+            <a:noFill/>
+            <a:prstDash val="solid"/>
+            <a:miter/>
+          </a:ln>
+        </p:spPr>
+      </p:sp>
+      <p:sp>
+        <p:nvSpPr>
+          <p:cNvPr name="Freeform 13" id="13"/>
+          <p:cNvSpPr/>
+          <p:nvPr/>
+        </p:nvSpPr>
+        <p:spPr>
+          <a:xfrm flipH="false" flipV="false" rot="0">
+            <a:off x="0" y="9424245"/>
+            <a:ext cx="18288000" cy="862755"/>
+          </a:xfrm>
+          <a:custGeom>
+            <a:avLst/>
+            <a:gdLst/>
+            <a:ahLst/>
+            <a:cxnLst/>
+            <a:rect r="r" b="b" t="t" l="l"/>
+            <a:pathLst>
+              <a:path h="862755" w="18288000">
+                <a:moveTo>
+                  <a:pt x="0" y="0"/>
+                </a:moveTo>
+                <a:lnTo>
+                  <a:pt x="18288000" y="0"/>
+                </a:lnTo>
+                <a:lnTo>
+                  <a:pt x="18288000" y="862755"/>
+                </a:lnTo>
+                <a:lnTo>
+                  <a:pt x="0" y="862755"/>
+                </a:lnTo>
+                <a:lnTo>
+                  <a:pt x="0" y="0"/>
+                </a:lnTo>
+                <a:close/>
+              </a:path>
+            </a:pathLst>
+          </a:custGeom>
+          <a:blipFill>
+            <a:blip r:embed="rId11">
+              <a:extLst>
+                <a:ext uri="{96DAC541-7B7A-43D3-8B79-37D633B846F1}">
+                  <asvg:svgBlip xmlns:asvg="http://schemas.microsoft.com/office/drawing/2016/SVG/main" r:embed="rId12"/>
+                </a:ext>
+              </a:extLst>
+            </a:blip>
+            <a:stretch>
+              <a:fillRect l="0" t="0" r="0" b="0"/>
+            </a:stretch>
+          </a:blipFill>
+        </p:spPr>
+      </p:sp>
       <p:grpSp>
         <p:nvGrpSpPr>
-          <p:cNvPr id="12" name="Group 12"/>
+          <p:cNvPr name="Group 14" id="14"/>
           <p:cNvGrpSpPr/>
           <p:nvPr/>
         </p:nvGrpSpPr>
         <p:grpSpPr>
-          <a:xfrm>
-            <a:off x="0" y="9677400"/>
-            <a:ext cx="18288000" cy="609600"/>
+          <a:xfrm rot="0">
+            <a:off x="1466773" y="4994201"/>
+            <a:ext cx="664213" cy="664213"/>
             <a:chOff x="0" y="0"/>
-            <a:chExt cx="4816593" cy="160553"/>
+            <a:chExt cx="885617" cy="885617"/>
           </a:xfrm>
         </p:grpSpPr>
+        <p:grpSp>
+          <p:nvGrpSpPr>
+            <p:cNvPr name="Group 15" id="15"/>
+            <p:cNvGrpSpPr/>
+            <p:nvPr/>
+          </p:nvGrpSpPr>
+          <p:grpSpPr>
+            <a:xfrm rot="0">
+              <a:off x="0" y="0"/>
+              <a:ext cx="885617" cy="885617"/>
+              <a:chOff x="0" y="0"/>
+              <a:chExt cx="812800" cy="812800"/>
+            </a:xfrm>
+          </p:grpSpPr>
+          <p:sp>
+            <p:nvSpPr>
+              <p:cNvPr name="Freeform 16" id="16"/>
+              <p:cNvSpPr/>
+              <p:nvPr/>
+            </p:nvSpPr>
+            <p:spPr>
+              <a:xfrm flipH="false" flipV="false" rot="0">
+                <a:off x="0" y="0"/>
+                <a:ext cx="812800" cy="812800"/>
+              </a:xfrm>
+              <a:custGeom>
+                <a:avLst/>
+                <a:gdLst/>
+                <a:ahLst/>
+                <a:cxnLst/>
+                <a:rect r="r" b="b" t="t" l="l"/>
+                <a:pathLst>
+                  <a:path h="812800" w="812800">
+                    <a:moveTo>
+                      <a:pt x="406400" y="0"/>
+                    </a:moveTo>
+                    <a:cubicBezTo>
+                      <a:pt x="181951" y="0"/>
+                      <a:pt x="0" y="181951"/>
+                      <a:pt x="0" y="406400"/>
+                    </a:cubicBezTo>
+                    <a:cubicBezTo>
+                      <a:pt x="0" y="630849"/>
+                      <a:pt x="181951" y="812800"/>
+                      <a:pt x="406400" y="812800"/>
+                    </a:cubicBezTo>
+                    <a:cubicBezTo>
+                      <a:pt x="630849" y="812800"/>
+                      <a:pt x="812800" y="630849"/>
+                      <a:pt x="812800" y="406400"/>
+                    </a:cubicBezTo>
+                    <a:cubicBezTo>
+                      <a:pt x="812800" y="181951"/>
+                      <a:pt x="630849" y="0"/>
+                      <a:pt x="406400" y="0"/>
+                    </a:cubicBezTo>
+                    <a:close/>
+                  </a:path>
+                </a:pathLst>
+              </a:custGeom>
+              <a:solidFill>
+                <a:srgbClr val="B9D1BF"/>
+              </a:solidFill>
+            </p:spPr>
+          </p:sp>
+          <p:sp>
+            <p:nvSpPr>
+              <p:cNvPr name="TextBox 17" id="17"/>
+              <p:cNvSpPr txBox="true"/>
+              <p:nvPr/>
+            </p:nvSpPr>
+            <p:spPr>
+              <a:xfrm>
+                <a:off x="76200" y="9525"/>
+                <a:ext cx="660400" cy="727075"/>
+              </a:xfrm>
+              <a:prstGeom prst="rect">
+                <a:avLst/>
+              </a:prstGeom>
+            </p:spPr>
+            <p:txBody>
+              <a:bodyPr anchor="ctr" rtlCol="false" tIns="50800" lIns="50800" bIns="50800" rIns="50800"/>
+              <a:lstStyle/>
+              <a:p>
+                <a:pPr algn="ctr">
+                  <a:lnSpc>
+                    <a:spcPts val="3024"/>
+                  </a:lnSpc>
+                </a:pPr>
+              </a:p>
+            </p:txBody>
+          </p:sp>
+        </p:grpSp>
         <p:sp>
           <p:nvSpPr>
-            <p:cNvPr id="13" name="Freeform 13"/>
+            <p:cNvPr name="Freeform 18" id="18"/>
             <p:cNvSpPr/>
             <p:nvPr/>
           </p:nvSpPr>
           <p:spPr>
-            <a:xfrm>
-              <a:off x="0" y="0"/>
-              <a:ext cx="4816592" cy="160553"/>
+            <a:xfrm flipH="false" flipV="false" rot="0">
+              <a:off x="239458" y="180882"/>
+              <a:ext cx="406701" cy="523854"/>
             </a:xfrm>
             <a:custGeom>
               <a:avLst/>
               <a:gdLst/>
               <a:ahLst/>
               <a:cxnLst/>
-              <a:rect l="l" t="t" r="r" b="b"/>
+              <a:rect r="r" b="b" t="t" l="l"/>
               <a:pathLst>
-                <a:path w="4816592" h="160553">
+                <a:path h="523854" w="406701">
                   <a:moveTo>
                     <a:pt x="0" y="0"/>
                   </a:moveTo>
                   <a:lnTo>
-                    <a:pt x="4816592" y="0"/>
+                    <a:pt x="406701" y="0"/>
                   </a:lnTo>
                   <a:lnTo>
-                    <a:pt x="4816592" y="160553"/>
+                    <a:pt x="406701" y="523854"/>
                   </a:lnTo>
                   <a:lnTo>
-                    <a:pt x="0" y="160553"/>
+                    <a:pt x="0" y="523854"/>
+                  </a:lnTo>
+                  <a:lnTo>
+                    <a:pt x="0" y="0"/>
                   </a:lnTo>
                   <a:close/>
                 </a:path>
               </a:pathLst>
             </a:custGeom>
-            <a:solidFill>
-              <a:srgbClr val="39FF5F"/>
-            </a:solidFill>
+            <a:blipFill>
+              <a:blip r:embed="rId13">
+                <a:extLst>
+                  <a:ext uri="{96DAC541-7B7A-43D3-8B79-37D633B846F1}">
+                    <asvg:svgBlip xmlns:asvg="http://schemas.microsoft.com/office/drawing/2016/SVG/main" r:embed="rId14"/>
+                  </a:ext>
+                </a:extLst>
+              </a:blip>
+              <a:stretch>
+                <a:fillRect l="0" t="0" r="0" b="0"/>
+              </a:stretch>
+            </a:blipFill>
           </p:spPr>
         </p:sp>
+      </p:grpSp>
+      <p:grpSp>
+        <p:nvGrpSpPr>
+          <p:cNvPr name="Group 19" id="19"/>
+          <p:cNvGrpSpPr/>
+          <p:nvPr/>
+        </p:nvGrpSpPr>
+        <p:grpSpPr>
+          <a:xfrm rot="0">
+            <a:off x="1466773" y="6067989"/>
+            <a:ext cx="664213" cy="664213"/>
+            <a:chOff x="0" y="0"/>
+            <a:chExt cx="885617" cy="885617"/>
+          </a:xfrm>
+        </p:grpSpPr>
+        <p:grpSp>
+          <p:nvGrpSpPr>
+            <p:cNvPr name="Group 20" id="20"/>
+            <p:cNvGrpSpPr/>
+            <p:nvPr/>
+          </p:nvGrpSpPr>
+          <p:grpSpPr>
+            <a:xfrm rot="0">
+              <a:off x="0" y="0"/>
+              <a:ext cx="885617" cy="885617"/>
+              <a:chOff x="0" y="0"/>
+              <a:chExt cx="812800" cy="812800"/>
+            </a:xfrm>
+          </p:grpSpPr>
+          <p:sp>
+            <p:nvSpPr>
+              <p:cNvPr name="Freeform 21" id="21"/>
+              <p:cNvSpPr/>
+              <p:nvPr/>
+            </p:nvSpPr>
+            <p:spPr>
+              <a:xfrm flipH="false" flipV="false" rot="0">
+                <a:off x="0" y="0"/>
+                <a:ext cx="812800" cy="812800"/>
+              </a:xfrm>
+              <a:custGeom>
+                <a:avLst/>
+                <a:gdLst/>
+                <a:ahLst/>
+                <a:cxnLst/>
+                <a:rect r="r" b="b" t="t" l="l"/>
+                <a:pathLst>
+                  <a:path h="812800" w="812800">
+                    <a:moveTo>
+                      <a:pt x="406400" y="0"/>
+                    </a:moveTo>
+                    <a:cubicBezTo>
+                      <a:pt x="181951" y="0"/>
+                      <a:pt x="0" y="181951"/>
+                      <a:pt x="0" y="406400"/>
+                    </a:cubicBezTo>
+                    <a:cubicBezTo>
+                      <a:pt x="0" y="630849"/>
+                      <a:pt x="181951" y="812800"/>
+                      <a:pt x="406400" y="812800"/>
+                    </a:cubicBezTo>
+                    <a:cubicBezTo>
+                      <a:pt x="630849" y="812800"/>
+                      <a:pt x="812800" y="630849"/>
+                      <a:pt x="812800" y="406400"/>
+                    </a:cubicBezTo>
+                    <a:cubicBezTo>
+                      <a:pt x="812800" y="181951"/>
+                      <a:pt x="630849" y="0"/>
+                      <a:pt x="406400" y="0"/>
+                    </a:cubicBezTo>
+                    <a:close/>
+                  </a:path>
+                </a:pathLst>
+              </a:custGeom>
+              <a:solidFill>
+                <a:srgbClr val="B9D1BF"/>
+              </a:solidFill>
+            </p:spPr>
+          </p:sp>
+          <p:sp>
+            <p:nvSpPr>
+              <p:cNvPr name="TextBox 22" id="22"/>
+              <p:cNvSpPr txBox="true"/>
+              <p:nvPr/>
+            </p:nvSpPr>
+            <p:spPr>
+              <a:xfrm>
+                <a:off x="76200" y="9525"/>
+                <a:ext cx="660400" cy="727075"/>
+              </a:xfrm>
+              <a:prstGeom prst="rect">
+                <a:avLst/>
+              </a:prstGeom>
+            </p:spPr>
+            <p:txBody>
+              <a:bodyPr anchor="ctr" rtlCol="false" tIns="50800" lIns="50800" bIns="50800" rIns="50800"/>
+              <a:lstStyle/>
+              <a:p>
+                <a:pPr algn="ctr">
+                  <a:lnSpc>
+                    <a:spcPts val="3024"/>
+                  </a:lnSpc>
+                </a:pPr>
+              </a:p>
+            </p:txBody>
+          </p:sp>
+        </p:grpSp>
         <p:sp>
           <p:nvSpPr>
-            <p:cNvPr id="14" name="TextBox 14"/>
-            <p:cNvSpPr txBox="1"/>
+            <p:cNvPr name="Freeform 23" id="23"/>
+            <p:cNvSpPr/>
             <p:nvPr/>
           </p:nvSpPr>
           <p:spPr>
-            <a:xfrm>
-              <a:off x="0" y="-66675"/>
-              <a:ext cx="4816593" cy="227228"/>
+            <a:xfrm flipH="false" flipV="false" rot="0">
+              <a:off x="158334" y="239021"/>
+              <a:ext cx="568949" cy="407574"/>
+            </a:xfrm>
+            <a:custGeom>
+              <a:avLst/>
+              <a:gdLst/>
+              <a:ahLst/>
+              <a:cxnLst/>
+              <a:rect r="r" b="b" t="t" l="l"/>
+              <a:pathLst>
+                <a:path h="407574" w="568949">
+                  <a:moveTo>
+                    <a:pt x="0" y="0"/>
+                  </a:moveTo>
+                  <a:lnTo>
+                    <a:pt x="568949" y="0"/>
+                  </a:lnTo>
+                  <a:lnTo>
+                    <a:pt x="568949" y="407575"/>
+                  </a:lnTo>
+                  <a:lnTo>
+                    <a:pt x="0" y="407575"/>
+                  </a:lnTo>
+                  <a:lnTo>
+                    <a:pt x="0" y="0"/>
+                  </a:lnTo>
+                  <a:close/>
+                </a:path>
+              </a:pathLst>
+            </a:custGeom>
+            <a:blipFill>
+              <a:blip r:embed="rId15">
+                <a:extLst>
+                  <a:ext uri="{96DAC541-7B7A-43D3-8B79-37D633B846F1}">
+                    <asvg:svgBlip xmlns:asvg="http://schemas.microsoft.com/office/drawing/2016/SVG/main" r:embed="rId16"/>
+                  </a:ext>
+                </a:extLst>
+              </a:blip>
+              <a:stretch>
+                <a:fillRect l="0" t="0" r="0" b="0"/>
+              </a:stretch>
+            </a:blipFill>
+          </p:spPr>
+        </p:sp>
+      </p:grpSp>
+      <p:grpSp>
+        <p:nvGrpSpPr>
+          <p:cNvPr name="Group 24" id="24"/>
+          <p:cNvGrpSpPr/>
+          <p:nvPr/>
+        </p:nvGrpSpPr>
+        <p:grpSpPr>
+          <a:xfrm rot="0">
+            <a:off x="1466773" y="7137695"/>
+            <a:ext cx="664213" cy="664213"/>
+            <a:chOff x="0" y="0"/>
+            <a:chExt cx="885617" cy="885617"/>
+          </a:xfrm>
+        </p:grpSpPr>
+        <p:grpSp>
+          <p:nvGrpSpPr>
+            <p:cNvPr name="Group 25" id="25"/>
+            <p:cNvGrpSpPr/>
+            <p:nvPr/>
+          </p:nvGrpSpPr>
+          <p:grpSpPr>
+            <a:xfrm rot="0">
+              <a:off x="0" y="0"/>
+              <a:ext cx="885617" cy="885617"/>
+              <a:chOff x="0" y="0"/>
+              <a:chExt cx="812800" cy="812800"/>
+            </a:xfrm>
+          </p:grpSpPr>
+          <p:sp>
+            <p:nvSpPr>
+              <p:cNvPr name="Freeform 26" id="26"/>
+              <p:cNvSpPr/>
+              <p:nvPr/>
+            </p:nvSpPr>
+            <p:spPr>
+              <a:xfrm flipH="false" flipV="false" rot="0">
+                <a:off x="0" y="0"/>
+                <a:ext cx="812800" cy="812800"/>
+              </a:xfrm>
+              <a:custGeom>
+                <a:avLst/>
+                <a:gdLst/>
+                <a:ahLst/>
+                <a:cxnLst/>
+                <a:rect r="r" b="b" t="t" l="l"/>
+                <a:pathLst>
+                  <a:path h="812800" w="812800">
+                    <a:moveTo>
+                      <a:pt x="406400" y="0"/>
+                    </a:moveTo>
+                    <a:cubicBezTo>
+                      <a:pt x="181951" y="0"/>
+                      <a:pt x="0" y="181951"/>
+                      <a:pt x="0" y="406400"/>
+                    </a:cubicBezTo>
+                    <a:cubicBezTo>
+                      <a:pt x="0" y="630849"/>
+                      <a:pt x="181951" y="812800"/>
+                      <a:pt x="406400" y="812800"/>
+                    </a:cubicBezTo>
+                    <a:cubicBezTo>
+                      <a:pt x="630849" y="812800"/>
+                      <a:pt x="812800" y="630849"/>
+                      <a:pt x="812800" y="406400"/>
+                    </a:cubicBezTo>
+                    <a:cubicBezTo>
+                      <a:pt x="812800" y="181951"/>
+                      <a:pt x="630849" y="0"/>
+                      <a:pt x="406400" y="0"/>
+                    </a:cubicBezTo>
+                    <a:close/>
+                  </a:path>
+                </a:pathLst>
+              </a:custGeom>
+              <a:solidFill>
+                <a:srgbClr val="B9D1BF"/>
+              </a:solidFill>
+            </p:spPr>
+          </p:sp>
+          <p:sp>
+            <p:nvSpPr>
+              <p:cNvPr name="TextBox 27" id="27"/>
+              <p:cNvSpPr txBox="true"/>
+              <p:nvPr/>
+            </p:nvSpPr>
+            <p:spPr>
+              <a:xfrm>
+                <a:off x="76200" y="9525"/>
+                <a:ext cx="660400" cy="727075"/>
+              </a:xfrm>
+              <a:prstGeom prst="rect">
+                <a:avLst/>
+              </a:prstGeom>
+            </p:spPr>
+            <p:txBody>
+              <a:bodyPr anchor="ctr" rtlCol="false" tIns="50800" lIns="50800" bIns="50800" rIns="50800"/>
+              <a:lstStyle/>
+              <a:p>
+                <a:pPr algn="ctr">
+                  <a:lnSpc>
+                    <a:spcPts val="3024"/>
+                  </a:lnSpc>
+                </a:pPr>
+              </a:p>
+            </p:txBody>
+          </p:sp>
+        </p:grpSp>
+        <p:sp>
+          <p:nvSpPr>
+            <p:cNvPr name="Freeform 28" id="28"/>
+            <p:cNvSpPr/>
+            <p:nvPr/>
+          </p:nvSpPr>
+          <p:spPr>
+            <a:xfrm flipH="false" flipV="false" rot="0">
+              <a:off x="197640" y="167056"/>
+              <a:ext cx="490338" cy="551505"/>
+            </a:xfrm>
+            <a:custGeom>
+              <a:avLst/>
+              <a:gdLst/>
+              <a:ahLst/>
+              <a:cxnLst/>
+              <a:rect r="r" b="b" t="t" l="l"/>
+              <a:pathLst>
+                <a:path h="551505" w="490338">
+                  <a:moveTo>
+                    <a:pt x="0" y="0"/>
+                  </a:moveTo>
+                  <a:lnTo>
+                    <a:pt x="490338" y="0"/>
+                  </a:lnTo>
+                  <a:lnTo>
+                    <a:pt x="490338" y="551505"/>
+                  </a:lnTo>
+                  <a:lnTo>
+                    <a:pt x="0" y="551505"/>
+                  </a:lnTo>
+                  <a:lnTo>
+                    <a:pt x="0" y="0"/>
+                  </a:lnTo>
+                  <a:close/>
+                </a:path>
+              </a:pathLst>
+            </a:custGeom>
+            <a:blipFill>
+              <a:blip r:embed="rId17">
+                <a:extLst>
+                  <a:ext uri="{96DAC541-7B7A-43D3-8B79-37D633B846F1}">
+                    <asvg:svgBlip xmlns:asvg="http://schemas.microsoft.com/office/drawing/2016/SVG/main" r:embed="rId18"/>
+                  </a:ext>
+                </a:extLst>
+              </a:blip>
+              <a:stretch>
+                <a:fillRect l="0" t="0" r="0" b="0"/>
+              </a:stretch>
+            </a:blipFill>
+          </p:spPr>
+        </p:sp>
+      </p:grpSp>
+      <p:grpSp>
+        <p:nvGrpSpPr>
+          <p:cNvPr name="Group 29" id="29"/>
+          <p:cNvGrpSpPr/>
+          <p:nvPr/>
+        </p:nvGrpSpPr>
+        <p:grpSpPr>
+          <a:xfrm rot="0">
+            <a:off x="1466773" y="8238787"/>
+            <a:ext cx="664213" cy="664213"/>
+            <a:chOff x="0" y="0"/>
+            <a:chExt cx="885617" cy="885617"/>
+          </a:xfrm>
+        </p:grpSpPr>
+        <p:grpSp>
+          <p:nvGrpSpPr>
+            <p:cNvPr name="Group 30" id="30"/>
+            <p:cNvGrpSpPr/>
+            <p:nvPr/>
+          </p:nvGrpSpPr>
+          <p:grpSpPr>
+            <a:xfrm rot="0">
+              <a:off x="0" y="0"/>
+              <a:ext cx="885617" cy="885617"/>
+              <a:chOff x="0" y="0"/>
+              <a:chExt cx="812800" cy="812800"/>
+            </a:xfrm>
+          </p:grpSpPr>
+          <p:sp>
+            <p:nvSpPr>
+              <p:cNvPr name="Freeform 31" id="31"/>
+              <p:cNvSpPr/>
+              <p:nvPr/>
+            </p:nvSpPr>
+            <p:spPr>
+              <a:xfrm flipH="false" flipV="false" rot="0">
+                <a:off x="0" y="0"/>
+                <a:ext cx="812800" cy="812800"/>
+              </a:xfrm>
+              <a:custGeom>
+                <a:avLst/>
+                <a:gdLst/>
+                <a:ahLst/>
+                <a:cxnLst/>
+                <a:rect r="r" b="b" t="t" l="l"/>
+                <a:pathLst>
+                  <a:path h="812800" w="812800">
+                    <a:moveTo>
+                      <a:pt x="406400" y="0"/>
+                    </a:moveTo>
+                    <a:cubicBezTo>
+                      <a:pt x="181951" y="0"/>
+                      <a:pt x="0" y="181951"/>
+                      <a:pt x="0" y="406400"/>
+                    </a:cubicBezTo>
+                    <a:cubicBezTo>
+                      <a:pt x="0" y="630849"/>
+                      <a:pt x="181951" y="812800"/>
+                      <a:pt x="406400" y="812800"/>
+                    </a:cubicBezTo>
+                    <a:cubicBezTo>
+                      <a:pt x="630849" y="812800"/>
+                      <a:pt x="812800" y="630849"/>
+                      <a:pt x="812800" y="406400"/>
+                    </a:cubicBezTo>
+                    <a:cubicBezTo>
+                      <a:pt x="812800" y="181951"/>
+                      <a:pt x="630849" y="0"/>
+                      <a:pt x="406400" y="0"/>
+                    </a:cubicBezTo>
+                    <a:close/>
+                  </a:path>
+                </a:pathLst>
+              </a:custGeom>
+              <a:solidFill>
+                <a:srgbClr val="B9D1BF"/>
+              </a:solidFill>
+            </p:spPr>
+          </p:sp>
+          <p:sp>
+            <p:nvSpPr>
+              <p:cNvPr name="TextBox 32" id="32"/>
+              <p:cNvSpPr txBox="true"/>
+              <p:nvPr/>
+            </p:nvSpPr>
+            <p:spPr>
+              <a:xfrm>
+                <a:off x="76200" y="9525"/>
+                <a:ext cx="660400" cy="727075"/>
+              </a:xfrm>
+              <a:prstGeom prst="rect">
+                <a:avLst/>
+              </a:prstGeom>
+            </p:spPr>
+            <p:txBody>
+              <a:bodyPr anchor="ctr" rtlCol="false" tIns="50800" lIns="50800" bIns="50800" rIns="50800"/>
+              <a:lstStyle/>
+              <a:p>
+                <a:pPr algn="ctr">
+                  <a:lnSpc>
+                    <a:spcPts val="3024"/>
+                  </a:lnSpc>
+                </a:pPr>
+              </a:p>
+            </p:txBody>
+          </p:sp>
+        </p:grpSp>
+        <p:sp>
+          <p:nvSpPr>
+            <p:cNvPr name="Freeform 33" id="33"/>
+            <p:cNvSpPr/>
+            <p:nvPr/>
+          </p:nvSpPr>
+          <p:spPr>
+            <a:xfrm flipH="false" flipV="false" rot="0">
+              <a:off x="155110" y="193818"/>
+              <a:ext cx="575398" cy="497981"/>
+            </a:xfrm>
+            <a:custGeom>
+              <a:avLst/>
+              <a:gdLst/>
+              <a:ahLst/>
+              <a:cxnLst/>
+              <a:rect r="r" b="b" t="t" l="l"/>
+              <a:pathLst>
+                <a:path h="497981" w="575398">
+                  <a:moveTo>
+                    <a:pt x="0" y="0"/>
+                  </a:moveTo>
+                  <a:lnTo>
+                    <a:pt x="575397" y="0"/>
+                  </a:lnTo>
+                  <a:lnTo>
+                    <a:pt x="575397" y="497981"/>
+                  </a:lnTo>
+                  <a:lnTo>
+                    <a:pt x="0" y="497981"/>
+                  </a:lnTo>
+                  <a:lnTo>
+                    <a:pt x="0" y="0"/>
+                  </a:lnTo>
+                  <a:close/>
+                </a:path>
+              </a:pathLst>
+            </a:custGeom>
+            <a:blipFill>
+              <a:blip r:embed="rId19">
+                <a:extLst>
+                  <a:ext uri="{96DAC541-7B7A-43D3-8B79-37D633B846F1}">
+                    <asvg:svgBlip xmlns:asvg="http://schemas.microsoft.com/office/drawing/2016/SVG/main" r:embed="rId20"/>
+                  </a:ext>
+                </a:extLst>
+              </a:blip>
+              <a:stretch>
+                <a:fillRect l="0" t="0" r="0" b="0"/>
+              </a:stretch>
+            </a:blipFill>
+          </p:spPr>
+        </p:sp>
+      </p:grpSp>
+      <p:grpSp>
+        <p:nvGrpSpPr>
+          <p:cNvPr name="Group 34" id="34"/>
+          <p:cNvGrpSpPr/>
+          <p:nvPr/>
+        </p:nvGrpSpPr>
+        <p:grpSpPr>
+          <a:xfrm rot="0">
+            <a:off x="2311687" y="4501225"/>
+            <a:ext cx="14386131" cy="4430350"/>
+            <a:chOff x="0" y="0"/>
+            <a:chExt cx="19181508" cy="5907133"/>
+          </a:xfrm>
+        </p:grpSpPr>
+        <p:sp>
+          <p:nvSpPr>
+            <p:cNvPr name="TextBox 35" id="35"/>
+            <p:cNvSpPr txBox="true"/>
+            <p:nvPr/>
+          </p:nvSpPr>
+          <p:spPr>
+            <a:xfrm rot="0">
+              <a:off x="0" y="-47625"/>
+              <a:ext cx="19181508" cy="5883880"/>
             </a:xfrm>
             <a:prstGeom prst="rect">
               <a:avLst/>
             </a:prstGeom>
           </p:spPr>
           <p:txBody>
-            <a:bodyPr lIns="50800" tIns="50800" rIns="50800" bIns="50800" rtlCol="0" anchor="ctr"/>
+            <a:bodyPr anchor="t" rtlCol="false" tIns="0" lIns="0" bIns="0" rIns="0">
+              <a:spAutoFit/>
+            </a:bodyPr>
             <a:lstStyle/>
             <a:p>
-              <a:pPr algn="ctr">
+              <a:pPr algn="l">
                 <a:lnSpc>
-                  <a:spcPts val="3024"/>
+                  <a:spcPts val="4472"/>
                 </a:lnSpc>
               </a:pPr>
-              <a:endParaRPr/>
+            </a:p>
+            <a:p>
+              <a:pPr algn="just">
+                <a:lnSpc>
+                  <a:spcPts val="4313"/>
+                </a:lnSpc>
+              </a:pPr>
+              <a:r>
+                <a:rPr lang="en-US" sz="3451">
+                  <a:solidFill>
+                    <a:srgbClr val="0B533D"/>
+                  </a:solidFill>
+                  <a:latin typeface="Cambria"/>
+                  <a:ea typeface="Cambria"/>
+                  <a:cs typeface="Cambria"/>
+                  <a:sym typeface="Cambria"/>
+                </a:rPr>
+                <a:t>Problem Statement Title: </a:t>
+              </a:r>
+            </a:p>
+            <a:p>
+              <a:pPr algn="just">
+                <a:lnSpc>
+                  <a:spcPts val="4313"/>
+                </a:lnSpc>
+              </a:pPr>
+            </a:p>
+            <a:p>
+              <a:pPr algn="just">
+                <a:lnSpc>
+                  <a:spcPts val="4313"/>
+                </a:lnSpc>
+              </a:pPr>
+              <a:r>
+                <a:rPr lang="en-US" sz="3451">
+                  <a:solidFill>
+                    <a:srgbClr val="0B533D"/>
+                  </a:solidFill>
+                  <a:latin typeface="Cambria"/>
+                  <a:ea typeface="Cambria"/>
+                  <a:cs typeface="Cambria"/>
+                  <a:sym typeface="Cambria"/>
+                </a:rPr>
+                <a:t>Team Name: </a:t>
+              </a:r>
+            </a:p>
+            <a:p>
+              <a:pPr algn="just">
+                <a:lnSpc>
+                  <a:spcPts val="4313"/>
+                </a:lnSpc>
+              </a:pPr>
+            </a:p>
+            <a:p>
+              <a:pPr algn="l">
+                <a:lnSpc>
+                  <a:spcPts val="4472"/>
+                </a:lnSpc>
+              </a:pPr>
+              <a:r>
+                <a:rPr lang="en-US" sz="3451">
+                  <a:solidFill>
+                    <a:srgbClr val="0B533D"/>
+                  </a:solidFill>
+                  <a:latin typeface="Cambria"/>
+                  <a:ea typeface="Cambria"/>
+                  <a:cs typeface="Cambria"/>
+                  <a:sym typeface="Cambria"/>
+                </a:rPr>
+                <a:t>Team Leader Name: </a:t>
+              </a:r>
+            </a:p>
+            <a:p>
+              <a:pPr algn="l">
+                <a:lnSpc>
+                  <a:spcPts val="4472"/>
+                </a:lnSpc>
+              </a:pPr>
+            </a:p>
+            <a:p>
+              <a:pPr algn="l">
+                <a:lnSpc>
+                  <a:spcPts val="4472"/>
+                </a:lnSpc>
+              </a:pPr>
+              <a:r>
+                <a:rPr lang="en-US" sz="3451">
+                  <a:solidFill>
+                    <a:srgbClr val="0B533D"/>
+                  </a:solidFill>
+                  <a:latin typeface="Cambria"/>
+                  <a:ea typeface="Cambria"/>
+                  <a:cs typeface="Cambria"/>
+                  <a:sym typeface="Cambria"/>
+                </a:rPr>
+                <a:t>Institute Name: </a:t>
+              </a:r>
             </a:p>
           </p:txBody>
         </p:sp>
+        <p:sp>
+          <p:nvSpPr>
+            <p:cNvPr name="AutoShape 36" id="36"/>
+            <p:cNvSpPr/>
+            <p:nvPr/>
+          </p:nvSpPr>
+          <p:spPr>
+            <a:xfrm>
+              <a:off x="6384423" y="1409077"/>
+              <a:ext cx="6767029" cy="0"/>
+            </a:xfrm>
+            <a:prstGeom prst="line">
+              <a:avLst/>
+            </a:prstGeom>
+            <a:ln cap="flat" w="38100">
+              <a:solidFill>
+                <a:srgbClr val="DDE7DF"/>
+              </a:solidFill>
+              <a:prstDash val="solid"/>
+              <a:headEnd type="none" len="sm" w="sm"/>
+              <a:tailEnd type="none" len="sm" w="sm"/>
+            </a:ln>
+          </p:spPr>
+        </p:sp>
+        <p:sp>
+          <p:nvSpPr>
+            <p:cNvPr name="AutoShape 37" id="37"/>
+            <p:cNvSpPr/>
+            <p:nvPr/>
+          </p:nvSpPr>
+          <p:spPr>
+            <a:xfrm>
+              <a:off x="3256035" y="2870559"/>
+              <a:ext cx="6767029" cy="0"/>
+            </a:xfrm>
+            <a:prstGeom prst="line">
+              <a:avLst/>
+            </a:prstGeom>
+            <a:ln cap="flat" w="38100">
+              <a:solidFill>
+                <a:srgbClr val="DDE7DF"/>
+              </a:solidFill>
+              <a:prstDash val="solid"/>
+              <a:headEnd type="none" len="sm" w="sm"/>
+              <a:tailEnd type="none" len="sm" w="sm"/>
+            </a:ln>
+          </p:spPr>
+        </p:sp>
+        <p:sp>
+          <p:nvSpPr>
+            <p:cNvPr name="AutoShape 38" id="38"/>
+            <p:cNvSpPr/>
+            <p:nvPr/>
+          </p:nvSpPr>
+          <p:spPr>
+            <a:xfrm>
+              <a:off x="5032007" y="4381859"/>
+              <a:ext cx="6767029" cy="0"/>
+            </a:xfrm>
+            <a:prstGeom prst="line">
+              <a:avLst/>
+            </a:prstGeom>
+            <a:ln cap="flat" w="38100">
+              <a:solidFill>
+                <a:srgbClr val="DDE7DF"/>
+              </a:solidFill>
+              <a:prstDash val="solid"/>
+              <a:headEnd type="none" len="sm" w="sm"/>
+              <a:tailEnd type="none" len="sm" w="sm"/>
+            </a:ln>
+          </p:spPr>
+        </p:sp>
+        <p:sp>
+          <p:nvSpPr>
+            <p:cNvPr name="AutoShape 39" id="39"/>
+            <p:cNvSpPr/>
+            <p:nvPr/>
+          </p:nvSpPr>
+          <p:spPr>
+            <a:xfrm>
+              <a:off x="3967937" y="5888083"/>
+              <a:ext cx="6767029" cy="0"/>
+            </a:xfrm>
+            <a:prstGeom prst="line">
+              <a:avLst/>
+            </a:prstGeom>
+            <a:ln cap="flat" w="38100">
+              <a:solidFill>
+                <a:srgbClr val="DDE7DF"/>
+              </a:solidFill>
+              <a:prstDash val="solid"/>
+              <a:headEnd type="none" len="sm" w="sm"/>
+              <a:tailEnd type="none" len="sm" w="sm"/>
+            </a:ln>
+          </p:spPr>
+        </p:sp>
       </p:grpSp>
       <p:sp>
         <p:nvSpPr>
-          <p:cNvPr id="15" name="TextBox 15"/>
-          <p:cNvSpPr txBox="1"/>
+          <p:cNvPr name="AutoShape 40" id="40"/>
+          <p:cNvSpPr/>
           <p:nvPr/>
         </p:nvSpPr>
         <p:spPr>
           <a:xfrm>
-            <a:off x="887373" y="2303200"/>
-            <a:ext cx="17235300" cy="862725"/>
+            <a:off x="2591033" y="3982113"/>
+            <a:ext cx="1851728" cy="0"/>
+          </a:xfrm>
+          <a:prstGeom prst="line">
+            <a:avLst/>
+          </a:prstGeom>
+          <a:ln cap="rnd" w="47625">
+            <a:solidFill>
+              <a:srgbClr val="045340"/>
+            </a:solidFill>
+            <a:prstDash val="solid"/>
+            <a:headEnd type="none" len="sm" w="sm"/>
+            <a:tailEnd type="none" len="sm" w="sm"/>
+          </a:ln>
+        </p:spPr>
+      </p:sp>
+      <p:sp>
+        <p:nvSpPr>
+          <p:cNvPr name="TextBox 41" id="41"/>
+          <p:cNvSpPr txBox="true"/>
+          <p:nvPr/>
+        </p:nvSpPr>
+        <p:spPr>
+          <a:xfrm rot="0">
+            <a:off x="6208852" y="9703384"/>
+            <a:ext cx="5346630" cy="453466"/>
           </a:xfrm>
           <a:prstGeom prst="rect">
             <a:avLst/>
           </a:prstGeom>
         </p:spPr>
         <p:txBody>
-          <a:bodyPr lIns="0" tIns="0" rIns="0" bIns="0" rtlCol="0" anchor="t">
+          <a:bodyPr anchor="t" rtlCol="false" tIns="0" lIns="0" bIns="0" rIns="0">
             <a:spAutoFit/>
           </a:bodyPr>
           <a:lstStyle/>
           <a:p>
-            <a:pPr algn="ctr">
+            <a:pPr algn="l">
+              <a:lnSpc>
+                <a:spcPts val="3499"/>
+              </a:lnSpc>
+            </a:pPr>
+            <a:r>
+              <a:rPr lang="en-US" sz="2700">
+                <a:solidFill>
+                  <a:srgbClr val="FFFFFF"/>
+                </a:solidFill>
+                <a:latin typeface="Cambria"/>
+                <a:ea typeface="Cambria"/>
+                <a:cs typeface="Cambria"/>
+                <a:sym typeface="Cambria"/>
+              </a:rPr>
+              <a:t>SRCAS HACKATHON - 3.0 template</a:t>
+            </a:r>
+          </a:p>
+        </p:txBody>
+      </p:sp>
+      <p:sp>
+        <p:nvSpPr>
+          <p:cNvPr name="TextBox 42" id="42"/>
+          <p:cNvSpPr txBox="true"/>
+          <p:nvPr/>
+        </p:nvSpPr>
+        <p:spPr>
+          <a:xfrm rot="0">
+            <a:off x="2591033" y="2388026"/>
+            <a:ext cx="15449688" cy="854042"/>
+          </a:xfrm>
+          <a:prstGeom prst="rect">
+            <a:avLst/>
+          </a:prstGeom>
+        </p:spPr>
+        <p:txBody>
+          <a:bodyPr anchor="t" rtlCol="false" tIns="0" lIns="0" bIns="0" rIns="0">
+            <a:spAutoFit/>
+          </a:bodyPr>
+          <a:lstStyle/>
+          <a:p>
+            <a:pPr algn="l">
               <a:lnSpc>
                 <a:spcPts val="6910"/>
               </a:lnSpc>
             </a:pPr>
             <a:r>
-              <a:rPr lang="en-US" sz="4800" b="1">
+              <a:rPr lang="en-US" b="true" sz="4800" spc="240">
                 <a:solidFill>
-                  <a:srgbClr val="000000"/>
+                  <a:srgbClr val="045340"/>
                 </a:solidFill>
                 <a:latin typeface="Cambria Bold"/>
                 <a:ea typeface="Cambria Bold"/>
                 <a:cs typeface="Cambria Bold"/>
                 <a:sym typeface="Cambria Bold"/>
               </a:rPr>
-              <a:t>Basic Details of the Team and Problem Statement</a:t>
-            </a:r>
-          </a:p>
-        </p:txBody>
-      </p:sp>
-      <p:sp>
-        <p:nvSpPr>
-          <p:cNvPr id="16" name="TextBox 16"/>
-          <p:cNvSpPr txBox="1"/>
+              <a:t>SRCAS H</a:t>
+            </a:r>
+            <a:r>
+              <a:rPr lang="en-US" b="true" sz="4800" spc="240">
+                <a:solidFill>
+                  <a:srgbClr val="045340"/>
+                </a:solidFill>
+                <a:latin typeface="Cambria Bold"/>
+                <a:ea typeface="Cambria Bold"/>
+                <a:cs typeface="Cambria Bold"/>
+                <a:sym typeface="Cambria Bold"/>
+              </a:rPr>
+              <a:t>ACKATHON 3.0</a:t>
+            </a:r>
+          </a:p>
+        </p:txBody>
+      </p:sp>
+      <p:sp>
+        <p:nvSpPr>
+          <p:cNvPr name="TextBox 43" id="43"/>
+          <p:cNvSpPr txBox="true"/>
           <p:nvPr/>
         </p:nvSpPr>
         <p:spPr>
-          <a:xfrm>
-            <a:off x="6208849" y="9741484"/>
-            <a:ext cx="5346634" cy="415370"/>
+          <a:xfrm rot="0">
+            <a:off x="2591033" y="3427218"/>
+            <a:ext cx="15449688" cy="358279"/>
           </a:xfrm>
           <a:prstGeom prst="rect">
             <a:avLst/>
           </a:prstGeom>
         </p:spPr>
         <p:txBody>
-          <a:bodyPr lIns="0" tIns="0" rIns="0" bIns="0" rtlCol="0" anchor="t">
+          <a:bodyPr anchor="t" rtlCol="false" tIns="0" lIns="0" bIns="0" rIns="0">
             <a:spAutoFit/>
           </a:bodyPr>
           <a:lstStyle/>
           <a:p>
             <a:pPr algn="l">
               <a:lnSpc>
-                <a:spcPts val="3499"/>
+                <a:spcPts val="2879"/>
               </a:lnSpc>
             </a:pPr>
             <a:r>
-              <a:rPr lang="en-US" sz="2700" dirty="0">
+              <a:rPr lang="en-US" sz="1999" spc="279">
                 <a:solidFill>
                   <a:srgbClr val="000000"/>
                 </a:solidFill>
@@ -5234,83 +6435,59 @@
                 <a:cs typeface="Cambria"/>
                 <a:sym typeface="Cambria"/>
               </a:rPr>
-              <a:t>SRCAS HACKATHON - 3.0 template</a:t>
-            </a:r>
-          </a:p>
-        </p:txBody>
-      </p:sp>
-      <p:pic>
-        <p:nvPicPr>
-          <p:cNvPr id="18" name="Picture 17">
-            <a:extLst>
-              <a:ext uri="{FF2B5EF4-FFF2-40B4-BE49-F238E27FC236}">
-                <a16:creationId xmlns:a16="http://schemas.microsoft.com/office/drawing/2014/main" id="{3036C189-6F64-D249-3506-DB026DFE0808}"/>
-              </a:ext>
-            </a:extLst>
-          </p:cNvPr>
-          <p:cNvPicPr>
-            <a:picLocks noChangeAspect="1"/>
-          </p:cNvPicPr>
-          <p:nvPr/>
-        </p:nvPicPr>
-        <p:blipFill>
-          <a:blip r:embed="rId5">
-            <a:extLst>
-              <a:ext uri="{28A0092B-C50C-407E-A947-70E740481C1C}">
-                <a14:useLocalDpi xmlns:a14="http://schemas.microsoft.com/office/drawing/2010/main" val="0"/>
-              </a:ext>
-            </a:extLst>
-          </a:blip>
-          <a:stretch>
-            <a:fillRect/>
-          </a:stretch>
-        </p:blipFill>
-        <p:spPr>
-          <a:xfrm>
-            <a:off x="9057053" y="702891"/>
-            <a:ext cx="4510125" cy="988931"/>
-          </a:xfrm>
-          <a:prstGeom prst="rect">
-            <a:avLst/>
-          </a:prstGeom>
-        </p:spPr>
-      </p:pic>
-      <p:pic>
-        <p:nvPicPr>
-          <p:cNvPr id="20" name="Picture 19">
-            <a:extLst>
-              <a:ext uri="{FF2B5EF4-FFF2-40B4-BE49-F238E27FC236}">
-                <a16:creationId xmlns:a16="http://schemas.microsoft.com/office/drawing/2014/main" id="{1509998E-CCEE-87C7-49DE-871E7F0EB3DA}"/>
-              </a:ext>
-            </a:extLst>
-          </p:cNvPr>
-          <p:cNvPicPr>
-            <a:picLocks noChangeAspect="1"/>
-          </p:cNvPicPr>
-          <p:nvPr/>
-        </p:nvPicPr>
-        <p:blipFill>
-          <a:blip r:embed="rId6">
-            <a:extLst>
-              <a:ext uri="{28A0092B-C50C-407E-A947-70E740481C1C}">
-                <a14:useLocalDpi xmlns:a14="http://schemas.microsoft.com/office/drawing/2010/main" val="0"/>
-              </a:ext>
-            </a:extLst>
-          </a:blip>
-          <a:stretch>
-            <a:fillRect/>
-          </a:stretch>
-        </p:blipFill>
-        <p:spPr>
-          <a:xfrm>
-            <a:off x="13820004" y="526936"/>
-            <a:ext cx="4220722" cy="1547219"/>
-          </a:xfrm>
-          <a:prstGeom prst="rect">
-            <a:avLst/>
-          </a:prstGeom>
-        </p:spPr>
-      </p:pic>
+              <a:t>INNOVATE </a:t>
+            </a:r>
+            <a:r>
+              <a:rPr lang="en-US" sz="1999" spc="279">
+                <a:solidFill>
+                  <a:srgbClr val="07533F"/>
+                </a:solidFill>
+                <a:latin typeface="Cambria"/>
+                <a:ea typeface="Cambria"/>
+                <a:cs typeface="Cambria"/>
+                <a:sym typeface="Cambria"/>
+              </a:rPr>
+              <a:t>•</a:t>
+            </a:r>
+            <a:r>
+              <a:rPr lang="en-US" sz="1999" spc="279">
+                <a:solidFill>
+                  <a:srgbClr val="000000"/>
+                </a:solidFill>
+                <a:latin typeface="Cambria"/>
+                <a:ea typeface="Cambria"/>
+                <a:cs typeface="Cambria"/>
+                <a:sym typeface="Cambria"/>
+              </a:rPr>
+              <a:t> BUILD</a:t>
+            </a:r>
+            <a:r>
+              <a:rPr lang="en-US" sz="1999" spc="279">
+                <a:solidFill>
+                  <a:srgbClr val="07533F"/>
+                </a:solidFill>
+                <a:latin typeface="Cambria"/>
+                <a:ea typeface="Cambria"/>
+                <a:cs typeface="Cambria"/>
+                <a:sym typeface="Cambria"/>
+              </a:rPr>
+              <a:t> •</a:t>
+            </a:r>
+            <a:r>
+              <a:rPr lang="en-US" sz="1999" spc="279">
+                <a:solidFill>
+                  <a:srgbClr val="000000"/>
+                </a:solidFill>
+                <a:latin typeface="Cambria"/>
+                <a:ea typeface="Cambria"/>
+                <a:cs typeface="Cambria"/>
+                <a:sym typeface="Cambria"/>
+              </a:rPr>
+              <a:t> IMPACT</a:t>
+            </a:r>
+          </a:p>
+        </p:txBody>
+      </p:sp>
     </p:spTree>
   </p:cSld>
   <p:clrMapOvr>
@@ -5320,7 +6497,7 @@
 </file>
 
 <file path=ppt/slides/slide2.xml><?xml version="1.0" encoding="utf-8"?>
-<p:sld xmlns:a="http://schemas.openxmlformats.org/drawingml/2006/main" xmlns:r="http://schemas.openxmlformats.org/officeDocument/2006/relationships" xmlns:p="http://schemas.openxmlformats.org/presentationml/2006/main">
+<p:sld xmlns:p="http://schemas.openxmlformats.org/presentationml/2006/main" xmlns:a="http://schemas.openxmlformats.org/drawingml/2006/main" xmlns:r="http://schemas.openxmlformats.org/officeDocument/2006/relationships">
   <p:cSld>
     <p:spTree>
       <p:nvGrpSpPr>
@@ -5336,88 +6513,83 @@
           <a:chExt cx="0" cy="0"/>
         </a:xfrm>
       </p:grpSpPr>
-      <p:sp>
-        <p:nvSpPr>
-          <p:cNvPr id="2" name="AutoShape 2"/>
-          <p:cNvSpPr/>
+      <p:grpSp>
+        <p:nvGrpSpPr>
+          <p:cNvPr name="Group 2" id="2"/>
+          <p:cNvGrpSpPr/>
           <p:nvPr/>
-        </p:nvSpPr>
-        <p:spPr>
-          <a:xfrm rot="76301">
-            <a:off x="1086788" y="2021997"/>
-            <a:ext cx="3433446" cy="0"/>
-          </a:xfrm>
-          <a:prstGeom prst="line">
-            <a:avLst/>
-          </a:prstGeom>
-          <a:ln w="57150" cap="rnd">
-            <a:solidFill>
-              <a:srgbClr val="0B533D"/>
-            </a:solidFill>
-            <a:prstDash val="solid"/>
-            <a:headEnd type="none" w="sm" len="sm"/>
-            <a:tailEnd type="none" w="sm" len="sm"/>
-          </a:ln>
-        </p:spPr>
-      </p:sp>
-      <p:sp>
-        <p:nvSpPr>
-          <p:cNvPr id="3" name="TextBox 3"/>
-          <p:cNvSpPr txBox="1"/>
+        </p:nvGrpSpPr>
+        <p:grpSpPr>
+          <a:xfrm rot="76320">
+            <a:off x="1058208" y="1993421"/>
+            <a:ext cx="3490598" cy="57150"/>
+            <a:chOff x="0" y="0"/>
+            <a:chExt cx="4654131" cy="76200"/>
+          </a:xfrm>
+        </p:grpSpPr>
+        <p:sp>
+          <p:nvSpPr>
+            <p:cNvPr name="Freeform 3" id="3"/>
+            <p:cNvSpPr/>
+            <p:nvPr/>
+          </p:nvSpPr>
+          <p:spPr>
+            <a:xfrm flipH="false" flipV="false" rot="0">
+              <a:off x="0" y="0"/>
+              <a:ext cx="4654169" cy="76200"/>
+            </a:xfrm>
+            <a:custGeom>
+              <a:avLst/>
+              <a:gdLst/>
+              <a:ahLst/>
+              <a:cxnLst/>
+              <a:rect r="r" b="b" t="t" l="l"/>
+              <a:pathLst>
+                <a:path h="76200" w="4654169">
+                  <a:moveTo>
+                    <a:pt x="0" y="0"/>
+                  </a:moveTo>
+                  <a:lnTo>
+                    <a:pt x="4654169" y="76200"/>
+                  </a:lnTo>
+                </a:path>
+              </a:pathLst>
+            </a:custGeom>
+            <a:blipFill>
+              <a:blip r:embed="rId3">
+                <a:alphaModFix amt="0"/>
+              </a:blip>
+              <a:stretch>
+                <a:fillRect l="0" t="-1140103" r="0" b="-1140103"/>
+              </a:stretch>
+            </a:blipFill>
+            <a:ln w="57150" cap="sq">
+              <a:solidFill>
+                <a:srgbClr val="0B533D"/>
+              </a:solidFill>
+              <a:prstDash val="solid"/>
+              <a:miter/>
+            </a:ln>
+          </p:spPr>
+        </p:sp>
+      </p:grpSp>
+      <p:sp>
+        <p:nvSpPr>
+          <p:cNvPr name="TextBox 4" id="4"/>
+          <p:cNvSpPr txBox="true"/>
           <p:nvPr/>
         </p:nvSpPr>
         <p:spPr>
-          <a:xfrm>
-            <a:off x="1028700" y="839003"/>
-            <a:ext cx="8301600" cy="971550"/>
+          <a:xfrm rot="0">
+            <a:off x="17192777" y="9580493"/>
+            <a:ext cx="784803" cy="456448"/>
           </a:xfrm>
           <a:prstGeom prst="rect">
             <a:avLst/>
           </a:prstGeom>
         </p:spPr>
         <p:txBody>
-          <a:bodyPr lIns="0" tIns="0" rIns="0" bIns="0" rtlCol="0" anchor="t">
-            <a:spAutoFit/>
-          </a:bodyPr>
-          <a:lstStyle/>
-          <a:p>
-            <a:pPr algn="l">
-              <a:lnSpc>
-                <a:spcPts val="7697"/>
-              </a:lnSpc>
-            </a:pPr>
-            <a:r>
-              <a:rPr lang="en-US" sz="5939" b="1">
-                <a:solidFill>
-                  <a:srgbClr val="000000"/>
-                </a:solidFill>
-                <a:latin typeface="Cambria Bold"/>
-                <a:ea typeface="Cambria Bold"/>
-                <a:cs typeface="Cambria Bold"/>
-                <a:sym typeface="Cambria Bold"/>
-              </a:rPr>
-              <a:t>Idea/Approach Details</a:t>
-            </a:r>
-          </a:p>
-        </p:txBody>
-      </p:sp>
-      <p:sp>
-        <p:nvSpPr>
-          <p:cNvPr id="4" name="TextBox 4"/>
-          <p:cNvSpPr txBox="1"/>
-          <p:nvPr/>
-        </p:nvSpPr>
-        <p:spPr>
-          <a:xfrm>
-            <a:off x="17192775" y="9647168"/>
-            <a:ext cx="784800" cy="389775"/>
-          </a:xfrm>
-          <a:prstGeom prst="rect">
-            <a:avLst/>
-          </a:prstGeom>
-        </p:spPr>
-        <p:txBody>
-          <a:bodyPr lIns="0" tIns="0" rIns="0" bIns="0" rtlCol="0" anchor="t">
+          <a:bodyPr anchor="t" rtlCol="false" tIns="0" lIns="0" bIns="0" rIns="0">
             <a:spAutoFit/>
           </a:bodyPr>
           <a:lstStyle/>
@@ -5444,30 +6616,169 @@
       </p:sp>
       <p:sp>
         <p:nvSpPr>
-          <p:cNvPr id="5" name="TextBox 5"/>
-          <p:cNvSpPr txBox="1"/>
+          <p:cNvPr name="Freeform 5" id="5"/>
+          <p:cNvSpPr/>
           <p:nvPr/>
         </p:nvSpPr>
         <p:spPr>
-          <a:xfrm>
-            <a:off x="1028700" y="3316359"/>
-            <a:ext cx="16556475" cy="2089150"/>
+          <a:xfrm flipH="false" flipV="false" rot="0">
+            <a:off x="0" y="9424245"/>
+            <a:ext cx="18288000" cy="862755"/>
+          </a:xfrm>
+          <a:custGeom>
+            <a:avLst/>
+            <a:gdLst/>
+            <a:ahLst/>
+            <a:cxnLst/>
+            <a:rect r="r" b="b" t="t" l="l"/>
+            <a:pathLst>
+              <a:path h="862755" w="18288000">
+                <a:moveTo>
+                  <a:pt x="0" y="0"/>
+                </a:moveTo>
+                <a:lnTo>
+                  <a:pt x="18288000" y="0"/>
+                </a:lnTo>
+                <a:lnTo>
+                  <a:pt x="18288000" y="862755"/>
+                </a:lnTo>
+                <a:lnTo>
+                  <a:pt x="0" y="862755"/>
+                </a:lnTo>
+                <a:lnTo>
+                  <a:pt x="0" y="0"/>
+                </a:lnTo>
+                <a:close/>
+              </a:path>
+            </a:pathLst>
+          </a:custGeom>
+          <a:blipFill>
+            <a:blip r:embed="rId4">
+              <a:extLst>
+                <a:ext uri="{96DAC541-7B7A-43D3-8B79-37D633B846F1}">
+                  <asvg:svgBlip xmlns:asvg="http://schemas.microsoft.com/office/drawing/2016/SVG/main" r:embed="rId5"/>
+                </a:ext>
+              </a:extLst>
+            </a:blip>
+            <a:stretch>
+              <a:fillRect l="0" t="0" r="0" b="0"/>
+            </a:stretch>
+          </a:blipFill>
+        </p:spPr>
+      </p:sp>
+      <p:sp>
+        <p:nvSpPr>
+          <p:cNvPr name="Freeform 6" id="6"/>
+          <p:cNvSpPr/>
+          <p:nvPr/>
+        </p:nvSpPr>
+        <p:spPr>
+          <a:xfrm flipH="false" flipV="false" rot="0">
+            <a:off x="14714122" y="342716"/>
+            <a:ext cx="3263458" cy="982059"/>
+          </a:xfrm>
+          <a:custGeom>
+            <a:avLst/>
+            <a:gdLst/>
+            <a:ahLst/>
+            <a:cxnLst/>
+            <a:rect r="r" b="b" t="t" l="l"/>
+            <a:pathLst>
+              <a:path h="982059" w="3263458">
+                <a:moveTo>
+                  <a:pt x="0" y="0"/>
+                </a:moveTo>
+                <a:lnTo>
+                  <a:pt x="3263458" y="0"/>
+                </a:lnTo>
+                <a:lnTo>
+                  <a:pt x="3263458" y="982059"/>
+                </a:lnTo>
+                <a:lnTo>
+                  <a:pt x="0" y="982059"/>
+                </a:lnTo>
+                <a:lnTo>
+                  <a:pt x="0" y="0"/>
+                </a:lnTo>
+                <a:close/>
+              </a:path>
+            </a:pathLst>
+          </a:custGeom>
+          <a:blipFill>
+            <a:blip r:embed="rId6"/>
+            <a:stretch>
+              <a:fillRect l="0" t="0" r="0" b="0"/>
+            </a:stretch>
+          </a:blipFill>
+        </p:spPr>
+      </p:sp>
+      <p:sp>
+        <p:nvSpPr>
+          <p:cNvPr name="TextBox 7" id="7"/>
+          <p:cNvSpPr txBox="true"/>
+          <p:nvPr/>
+        </p:nvSpPr>
+        <p:spPr>
+          <a:xfrm rot="0">
+            <a:off x="1028700" y="781850"/>
+            <a:ext cx="8301599" cy="1028700"/>
           </a:xfrm>
           <a:prstGeom prst="rect">
             <a:avLst/>
           </a:prstGeom>
         </p:spPr>
         <p:txBody>
-          <a:bodyPr lIns="0" tIns="0" rIns="0" bIns="0" rtlCol="0" anchor="t">
+          <a:bodyPr anchor="t" rtlCol="false" tIns="0" lIns="0" bIns="0" rIns="0">
             <a:spAutoFit/>
           </a:bodyPr>
           <a:lstStyle/>
           <a:p>
-            <a:pPr marL="755651" lvl="1" indent="-377825" algn="l">
+            <a:pPr algn="l">
+              <a:lnSpc>
+                <a:spcPts val="7697"/>
+              </a:lnSpc>
+            </a:pPr>
+            <a:r>
+              <a:rPr lang="en-US" sz="5939" b="true">
+                <a:solidFill>
+                  <a:srgbClr val="000000"/>
+                </a:solidFill>
+                <a:latin typeface="Cambria Bold"/>
+                <a:ea typeface="Cambria Bold"/>
+                <a:cs typeface="Cambria Bold"/>
+                <a:sym typeface="Cambria Bold"/>
+              </a:rPr>
+              <a:t>Idea/Approach Details</a:t>
+            </a:r>
+          </a:p>
+        </p:txBody>
+      </p:sp>
+      <p:sp>
+        <p:nvSpPr>
+          <p:cNvPr name="TextBox 8" id="8"/>
+          <p:cNvSpPr txBox="true"/>
+          <p:nvPr/>
+        </p:nvSpPr>
+        <p:spPr>
+          <a:xfrm rot="0">
+            <a:off x="1028700" y="2859157"/>
+            <a:ext cx="16556479" cy="2546347"/>
+          </a:xfrm>
+          <a:prstGeom prst="rect">
+            <a:avLst/>
+          </a:prstGeom>
+        </p:spPr>
+        <p:txBody>
+          <a:bodyPr anchor="t" rtlCol="false" tIns="0" lIns="0" bIns="0" rIns="0">
+            <a:spAutoFit/>
+          </a:bodyPr>
+          <a:lstStyle/>
+          <a:p>
+            <a:pPr algn="l" marL="800101" indent="-266700" lvl="2">
               <a:lnSpc>
                 <a:spcPts val="8750"/>
               </a:lnSpc>
-              <a:buAutoNum type="arabicPeriod"/>
+              <a:buAutoNum type="arabicPeriod" startAt="1"/>
             </a:pPr>
             <a:r>
               <a:rPr lang="en-US" sz="3500">
@@ -5483,11 +6794,11 @@
             </a:r>
           </a:p>
           <a:p>
-            <a:pPr marL="755651" lvl="1" indent="-377825" algn="l">
+            <a:pPr algn="l" marL="800101" indent="-266700" lvl="2">
               <a:lnSpc>
                 <a:spcPts val="8750"/>
               </a:lnSpc>
-              <a:buAutoNum type="arabicPeriod"/>
+              <a:buAutoNum type="arabicPeriod" startAt="1"/>
             </a:pPr>
             <a:r>
               <a:rPr lang="en-US" sz="3500">
@@ -5506,150 +6817,21 @@
       </p:sp>
       <p:sp>
         <p:nvSpPr>
-          <p:cNvPr id="6" name="Freeform 6"/>
-          <p:cNvSpPr/>
+          <p:cNvPr name="TextBox 9" id="9"/>
+          <p:cNvSpPr txBox="true"/>
           <p:nvPr/>
         </p:nvSpPr>
         <p:spPr>
-          <a:xfrm>
-            <a:off x="13657487" y="437420"/>
-            <a:ext cx="4173313" cy="1270252"/>
-          </a:xfrm>
-          <a:custGeom>
-            <a:avLst/>
-            <a:gdLst/>
-            <a:ahLst/>
-            <a:cxnLst/>
-            <a:rect l="l" t="t" r="r" b="b"/>
-            <a:pathLst>
-              <a:path w="4173313" h="1270252">
-                <a:moveTo>
-                  <a:pt x="0" y="0"/>
-                </a:moveTo>
-                <a:lnTo>
-                  <a:pt x="4173313" y="0"/>
-                </a:lnTo>
-                <a:lnTo>
-                  <a:pt x="4173313" y="1270252"/>
-                </a:lnTo>
-                <a:lnTo>
-                  <a:pt x="0" y="1270252"/>
-                </a:lnTo>
-                <a:lnTo>
-                  <a:pt x="0" y="0"/>
-                </a:lnTo>
-                <a:close/>
-              </a:path>
-            </a:pathLst>
-          </a:custGeom>
-          <a:blipFill>
-            <a:blip r:embed="rId3"/>
-            <a:stretch>
-              <a:fillRect/>
-            </a:stretch>
-          </a:blipFill>
-        </p:spPr>
-      </p:sp>
-      <p:grpSp>
-        <p:nvGrpSpPr>
-          <p:cNvPr id="7" name="Group 7"/>
-          <p:cNvGrpSpPr/>
-          <p:nvPr/>
-        </p:nvGrpSpPr>
-        <p:grpSpPr>
-          <a:xfrm>
-            <a:off x="0" y="9677400"/>
-            <a:ext cx="18288000" cy="609600"/>
-            <a:chOff x="0" y="0"/>
-            <a:chExt cx="4816593" cy="160553"/>
-          </a:xfrm>
-        </p:grpSpPr>
-        <p:sp>
-          <p:nvSpPr>
-            <p:cNvPr id="8" name="Freeform 8"/>
-            <p:cNvSpPr/>
-            <p:nvPr/>
-          </p:nvSpPr>
-          <p:spPr>
-            <a:xfrm>
-              <a:off x="0" y="0"/>
-              <a:ext cx="4816592" cy="160553"/>
-            </a:xfrm>
-            <a:custGeom>
-              <a:avLst/>
-              <a:gdLst/>
-              <a:ahLst/>
-              <a:cxnLst/>
-              <a:rect l="l" t="t" r="r" b="b"/>
-              <a:pathLst>
-                <a:path w="4816592" h="160553">
-                  <a:moveTo>
-                    <a:pt x="0" y="0"/>
-                  </a:moveTo>
-                  <a:lnTo>
-                    <a:pt x="4816592" y="0"/>
-                  </a:lnTo>
-                  <a:lnTo>
-                    <a:pt x="4816592" y="160553"/>
-                  </a:lnTo>
-                  <a:lnTo>
-                    <a:pt x="0" y="160553"/>
-                  </a:lnTo>
-                  <a:close/>
-                </a:path>
-              </a:pathLst>
-            </a:custGeom>
-            <a:solidFill>
-              <a:srgbClr val="39FF5F"/>
-            </a:solidFill>
-          </p:spPr>
-        </p:sp>
-        <p:sp>
-          <p:nvSpPr>
-            <p:cNvPr id="9" name="TextBox 9"/>
-            <p:cNvSpPr txBox="1"/>
-            <p:nvPr/>
-          </p:nvSpPr>
-          <p:spPr>
-            <a:xfrm>
-              <a:off x="0" y="-66675"/>
-              <a:ext cx="4816593" cy="227228"/>
-            </a:xfrm>
-            <a:prstGeom prst="rect">
-              <a:avLst/>
-            </a:prstGeom>
-          </p:spPr>
-          <p:txBody>
-            <a:bodyPr lIns="50800" tIns="50800" rIns="50800" bIns="50800" rtlCol="0" anchor="ctr"/>
-            <a:lstStyle/>
-            <a:p>
-              <a:pPr algn="ctr">
-                <a:lnSpc>
-                  <a:spcPts val="3024"/>
-                </a:lnSpc>
-              </a:pPr>
-              <a:endParaRPr/>
-            </a:p>
-          </p:txBody>
-        </p:sp>
-      </p:grpSp>
-      <p:sp>
-        <p:nvSpPr>
-          <p:cNvPr id="10" name="TextBox 10"/>
-          <p:cNvSpPr txBox="1"/>
-          <p:nvPr/>
-        </p:nvSpPr>
-        <p:spPr>
-          <a:xfrm>
-            <a:off x="6208849" y="9741484"/>
-            <a:ext cx="5346634" cy="415370"/>
+          <a:xfrm rot="0">
+            <a:off x="6208852" y="9703384"/>
+            <a:ext cx="5346630" cy="453466"/>
           </a:xfrm>
           <a:prstGeom prst="rect">
             <a:avLst/>
           </a:prstGeom>
         </p:spPr>
         <p:txBody>
-          <a:bodyPr lIns="0" tIns="0" rIns="0" bIns="0" rtlCol="0" anchor="t">
+          <a:bodyPr anchor="t" rtlCol="false" tIns="0" lIns="0" bIns="0" rIns="0">
             <a:spAutoFit/>
           </a:bodyPr>
           <a:lstStyle/>
@@ -5660,9 +6842,9 @@
               </a:lnSpc>
             </a:pPr>
             <a:r>
-              <a:rPr lang="en-US" sz="2700" dirty="0">
+              <a:rPr lang="en-US" sz="2700">
                 <a:solidFill>
-                  <a:srgbClr val="000000"/>
+                  <a:srgbClr val="FFFFFF"/>
                 </a:solidFill>
                 <a:latin typeface="Cambria"/>
                 <a:ea typeface="Cambria"/>
@@ -5683,7 +6865,7 @@
 </file>
 
 <file path=ppt/slides/slide3.xml><?xml version="1.0" encoding="utf-8"?>
-<p:sld xmlns:a="http://schemas.openxmlformats.org/drawingml/2006/main" xmlns:r="http://schemas.openxmlformats.org/officeDocument/2006/relationships" xmlns:p="http://schemas.openxmlformats.org/presentationml/2006/main">
+<p:sld xmlns:p="http://schemas.openxmlformats.org/presentationml/2006/main" xmlns:a="http://schemas.openxmlformats.org/drawingml/2006/main" xmlns:r="http://schemas.openxmlformats.org/officeDocument/2006/relationships">
   <p:cSld>
     <p:spTree>
       <p:nvGrpSpPr>
@@ -5699,47 +6881,83 @@
           <a:chExt cx="0" cy="0"/>
         </a:xfrm>
       </p:grpSpPr>
-      <p:sp>
-        <p:nvSpPr>
-          <p:cNvPr id="2" name="AutoShape 2"/>
-          <p:cNvSpPr/>
+      <p:grpSp>
+        <p:nvGrpSpPr>
+          <p:cNvPr name="Group 2" id="2"/>
+          <p:cNvGrpSpPr/>
           <p:nvPr/>
-        </p:nvSpPr>
-        <p:spPr>
-          <a:xfrm rot="76301">
-            <a:off x="1086788" y="2021997"/>
-            <a:ext cx="3433446" cy="0"/>
-          </a:xfrm>
-          <a:prstGeom prst="line">
-            <a:avLst/>
-          </a:prstGeom>
-          <a:ln w="57150" cap="rnd">
-            <a:solidFill>
-              <a:srgbClr val="0B533D"/>
-            </a:solidFill>
-            <a:prstDash val="solid"/>
-            <a:headEnd type="none" w="sm" len="sm"/>
-            <a:tailEnd type="none" w="sm" len="sm"/>
-          </a:ln>
-        </p:spPr>
-      </p:sp>
-      <p:sp>
-        <p:nvSpPr>
-          <p:cNvPr id="3" name="TextBox 3"/>
-          <p:cNvSpPr txBox="1"/>
+        </p:nvGrpSpPr>
+        <p:grpSpPr>
+          <a:xfrm rot="76320">
+            <a:off x="1058208" y="1993421"/>
+            <a:ext cx="3490598" cy="57150"/>
+            <a:chOff x="0" y="0"/>
+            <a:chExt cx="4654131" cy="76200"/>
+          </a:xfrm>
+        </p:grpSpPr>
+        <p:sp>
+          <p:nvSpPr>
+            <p:cNvPr name="Freeform 3" id="3"/>
+            <p:cNvSpPr/>
+            <p:nvPr/>
+          </p:nvSpPr>
+          <p:spPr>
+            <a:xfrm flipH="false" flipV="false" rot="0">
+              <a:off x="0" y="0"/>
+              <a:ext cx="4654169" cy="76200"/>
+            </a:xfrm>
+            <a:custGeom>
+              <a:avLst/>
+              <a:gdLst/>
+              <a:ahLst/>
+              <a:cxnLst/>
+              <a:rect r="r" b="b" t="t" l="l"/>
+              <a:pathLst>
+                <a:path h="76200" w="4654169">
+                  <a:moveTo>
+                    <a:pt x="0" y="0"/>
+                  </a:moveTo>
+                  <a:lnTo>
+                    <a:pt x="4654169" y="76200"/>
+                  </a:lnTo>
+                </a:path>
+              </a:pathLst>
+            </a:custGeom>
+            <a:blipFill>
+              <a:blip r:embed="rId3">
+                <a:alphaModFix amt="0"/>
+              </a:blip>
+              <a:stretch>
+                <a:fillRect l="0" t="-1140103" r="0" b="-1140103"/>
+              </a:stretch>
+            </a:blipFill>
+            <a:ln w="57150" cap="sq">
+              <a:solidFill>
+                <a:srgbClr val="0B533D"/>
+              </a:solidFill>
+              <a:prstDash val="solid"/>
+              <a:miter/>
+            </a:ln>
+          </p:spPr>
+        </p:sp>
+      </p:grpSp>
+      <p:sp>
+        <p:nvSpPr>
+          <p:cNvPr name="TextBox 4" id="4"/>
+          <p:cNvSpPr txBox="true"/>
           <p:nvPr/>
         </p:nvSpPr>
         <p:spPr>
-          <a:xfrm>
-            <a:off x="1028700" y="839003"/>
-            <a:ext cx="8301600" cy="971550"/>
+          <a:xfrm rot="0">
+            <a:off x="1028700" y="781850"/>
+            <a:ext cx="8301599" cy="1028700"/>
           </a:xfrm>
           <a:prstGeom prst="rect">
             <a:avLst/>
           </a:prstGeom>
         </p:spPr>
         <p:txBody>
-          <a:bodyPr lIns="0" tIns="0" rIns="0" bIns="0" rtlCol="0" anchor="t">
+          <a:bodyPr anchor="t" rtlCol="false" tIns="0" lIns="0" bIns="0" rIns="0">
             <a:spAutoFit/>
           </a:bodyPr>
           <a:lstStyle/>
@@ -5750,7 +6968,7 @@
               </a:lnSpc>
             </a:pPr>
             <a:r>
-              <a:rPr lang="en-US" sz="5939" b="1">
+              <a:rPr lang="en-US" sz="5939" b="true">
                 <a:solidFill>
                   <a:srgbClr val="000000"/>
                 </a:solidFill>
@@ -5766,21 +6984,21 @@
       </p:sp>
       <p:sp>
         <p:nvSpPr>
-          <p:cNvPr id="4" name="TextBox 4"/>
-          <p:cNvSpPr txBox="1"/>
+          <p:cNvPr name="TextBox 5" id="5"/>
+          <p:cNvSpPr txBox="true"/>
           <p:nvPr/>
         </p:nvSpPr>
         <p:spPr>
-          <a:xfrm>
-            <a:off x="17192775" y="9647168"/>
-            <a:ext cx="784800" cy="389775"/>
+          <a:xfrm rot="0">
+            <a:off x="17192777" y="9580493"/>
+            <a:ext cx="784803" cy="456448"/>
           </a:xfrm>
           <a:prstGeom prst="rect">
             <a:avLst/>
           </a:prstGeom>
         </p:spPr>
         <p:txBody>
-          <a:bodyPr lIns="0" tIns="0" rIns="0" bIns="0" rtlCol="0" anchor="t">
+          <a:bodyPr anchor="t" rtlCol="false" tIns="0" lIns="0" bIns="0" rIns="0">
             <a:spAutoFit/>
           </a:bodyPr>
           <a:lstStyle/>
@@ -5807,34 +7025,34 @@
       </p:sp>
       <p:sp>
         <p:nvSpPr>
-          <p:cNvPr id="5" name="Freeform 5"/>
+          <p:cNvPr name="Freeform 6" id="6"/>
           <p:cNvSpPr/>
           <p:nvPr/>
         </p:nvSpPr>
         <p:spPr>
-          <a:xfrm>
-            <a:off x="13657487" y="437420"/>
-            <a:ext cx="4173313" cy="1270252"/>
+          <a:xfrm flipH="false" flipV="false" rot="0">
+            <a:off x="0" y="9424245"/>
+            <a:ext cx="18288000" cy="862755"/>
           </a:xfrm>
           <a:custGeom>
             <a:avLst/>
             <a:gdLst/>
             <a:ahLst/>
             <a:cxnLst/>
-            <a:rect l="l" t="t" r="r" b="b"/>
+            <a:rect r="r" b="b" t="t" l="l"/>
             <a:pathLst>
-              <a:path w="4173313" h="1270252">
+              <a:path h="862755" w="18288000">
                 <a:moveTo>
                   <a:pt x="0" y="0"/>
                 </a:moveTo>
                 <a:lnTo>
-                  <a:pt x="4173313" y="0"/>
+                  <a:pt x="18288000" y="0"/>
                 </a:lnTo>
                 <a:lnTo>
-                  <a:pt x="4173313" y="1270252"/>
+                  <a:pt x="18288000" y="862755"/>
                 </a:lnTo>
                 <a:lnTo>
-                  <a:pt x="0" y="1270252"/>
+                  <a:pt x="0" y="862755"/>
                 </a:lnTo>
                 <a:lnTo>
                   <a:pt x="0" y="0"/>
@@ -5844,113 +7062,36 @@
             </a:pathLst>
           </a:custGeom>
           <a:blipFill>
-            <a:blip r:embed="rId3"/>
+            <a:blip r:embed="rId4">
+              <a:extLst>
+                <a:ext uri="{96DAC541-7B7A-43D3-8B79-37D633B846F1}">
+                  <asvg:svgBlip xmlns:asvg="http://schemas.microsoft.com/office/drawing/2016/SVG/main" r:embed="rId5"/>
+                </a:ext>
+              </a:extLst>
+            </a:blip>
             <a:stretch>
-              <a:fillRect/>
+              <a:fillRect l="0" t="0" r="0" b="0"/>
             </a:stretch>
           </a:blipFill>
         </p:spPr>
       </p:sp>
-      <p:grpSp>
-        <p:nvGrpSpPr>
-          <p:cNvPr id="6" name="Group 6"/>
-          <p:cNvGrpSpPr/>
+      <p:sp>
+        <p:nvSpPr>
+          <p:cNvPr name="TextBox 7" id="7"/>
+          <p:cNvSpPr txBox="true"/>
           <p:nvPr/>
-        </p:nvGrpSpPr>
-        <p:grpSpPr>
-          <a:xfrm>
-            <a:off x="0" y="9677400"/>
-            <a:ext cx="18288000" cy="609600"/>
-            <a:chOff x="0" y="0"/>
-            <a:chExt cx="4816593" cy="160553"/>
-          </a:xfrm>
-        </p:grpSpPr>
-        <p:sp>
-          <p:nvSpPr>
-            <p:cNvPr id="7" name="Freeform 7"/>
-            <p:cNvSpPr/>
-            <p:nvPr/>
-          </p:nvSpPr>
-          <p:spPr>
-            <a:xfrm>
-              <a:off x="0" y="0"/>
-              <a:ext cx="4816592" cy="160553"/>
-            </a:xfrm>
-            <a:custGeom>
-              <a:avLst/>
-              <a:gdLst/>
-              <a:ahLst/>
-              <a:cxnLst/>
-              <a:rect l="l" t="t" r="r" b="b"/>
-              <a:pathLst>
-                <a:path w="4816592" h="160553">
-                  <a:moveTo>
-                    <a:pt x="0" y="0"/>
-                  </a:moveTo>
-                  <a:lnTo>
-                    <a:pt x="4816592" y="0"/>
-                  </a:lnTo>
-                  <a:lnTo>
-                    <a:pt x="4816592" y="160553"/>
-                  </a:lnTo>
-                  <a:lnTo>
-                    <a:pt x="0" y="160553"/>
-                  </a:lnTo>
-                  <a:close/>
-                </a:path>
-              </a:pathLst>
-            </a:custGeom>
-            <a:solidFill>
-              <a:srgbClr val="39FF5F"/>
-            </a:solidFill>
-          </p:spPr>
-        </p:sp>
-        <p:sp>
-          <p:nvSpPr>
-            <p:cNvPr id="8" name="TextBox 8"/>
-            <p:cNvSpPr txBox="1"/>
-            <p:nvPr/>
-          </p:nvSpPr>
-          <p:spPr>
-            <a:xfrm>
-              <a:off x="0" y="-66675"/>
-              <a:ext cx="4816593" cy="227228"/>
-            </a:xfrm>
-            <a:prstGeom prst="rect">
-              <a:avLst/>
-            </a:prstGeom>
-          </p:spPr>
-          <p:txBody>
-            <a:bodyPr lIns="50800" tIns="50800" rIns="50800" bIns="50800" rtlCol="0" anchor="ctr"/>
-            <a:lstStyle/>
-            <a:p>
-              <a:pPr algn="ctr">
-                <a:lnSpc>
-                  <a:spcPts val="3024"/>
-                </a:lnSpc>
-              </a:pPr>
-              <a:endParaRPr/>
-            </a:p>
-          </p:txBody>
-        </p:sp>
-      </p:grpSp>
-      <p:sp>
-        <p:nvSpPr>
-          <p:cNvPr id="9" name="TextBox 9"/>
-          <p:cNvSpPr txBox="1"/>
-          <p:nvPr/>
-        </p:nvSpPr>
-        <p:spPr>
-          <a:xfrm>
-            <a:off x="6208849" y="9741484"/>
-            <a:ext cx="5346634" cy="415370"/>
+        </p:nvSpPr>
+        <p:spPr>
+          <a:xfrm rot="0">
+            <a:off x="6208852" y="9703384"/>
+            <a:ext cx="5346630" cy="453466"/>
           </a:xfrm>
           <a:prstGeom prst="rect">
             <a:avLst/>
           </a:prstGeom>
         </p:spPr>
         <p:txBody>
-          <a:bodyPr lIns="0" tIns="0" rIns="0" bIns="0" rtlCol="0" anchor="t">
+          <a:bodyPr anchor="t" rtlCol="false" tIns="0" lIns="0" bIns="0" rIns="0">
             <a:spAutoFit/>
           </a:bodyPr>
           <a:lstStyle/>
@@ -5961,9 +7102,9 @@
               </a:lnSpc>
             </a:pPr>
             <a:r>
-              <a:rPr lang="en-US" sz="2700" dirty="0">
+              <a:rPr lang="en-US" sz="2700">
                 <a:solidFill>
-                  <a:srgbClr val="000000"/>
+                  <a:srgbClr val="FFFFFF"/>
                 </a:solidFill>
                 <a:latin typeface="Cambria"/>
                 <a:ea typeface="Cambria"/>
@@ -5977,30 +7118,30 @@
       </p:sp>
       <p:sp>
         <p:nvSpPr>
-          <p:cNvPr id="10" name="TextBox 10"/>
-          <p:cNvSpPr txBox="1"/>
+          <p:cNvPr name="TextBox 8" id="8"/>
+          <p:cNvSpPr txBox="true"/>
           <p:nvPr/>
         </p:nvSpPr>
         <p:spPr>
-          <a:xfrm>
-            <a:off x="1028700" y="3030609"/>
-            <a:ext cx="16556475" cy="3194050"/>
+          <a:xfrm rot="0">
+            <a:off x="1028700" y="2573407"/>
+            <a:ext cx="16556479" cy="3651247"/>
           </a:xfrm>
           <a:prstGeom prst="rect">
             <a:avLst/>
           </a:prstGeom>
         </p:spPr>
         <p:txBody>
-          <a:bodyPr lIns="0" tIns="0" rIns="0" bIns="0" rtlCol="0" anchor="t">
+          <a:bodyPr anchor="t" rtlCol="false" tIns="0" lIns="0" bIns="0" rIns="0">
             <a:spAutoFit/>
           </a:bodyPr>
           <a:lstStyle/>
           <a:p>
-            <a:pPr marL="755651" lvl="1" indent="-377825" algn="l">
+            <a:pPr algn="l" marL="800101" indent="-266700" lvl="2">
               <a:lnSpc>
                 <a:spcPts val="8750"/>
               </a:lnSpc>
-              <a:buAutoNum type="arabicPeriod"/>
+              <a:buAutoNum type="arabicPeriod" startAt="1"/>
             </a:pPr>
             <a:r>
               <a:rPr lang="en-US" sz="3500">
@@ -6016,11 +7157,11 @@
             </a:r>
           </a:p>
           <a:p>
-            <a:pPr marL="755651" lvl="1" indent="-377825" algn="l">
+            <a:pPr algn="l" marL="800101" indent="-266700" lvl="2">
               <a:lnSpc>
                 <a:spcPts val="8750"/>
               </a:lnSpc>
-              <a:buAutoNum type="arabicPeriod"/>
+              <a:buAutoNum type="arabicPeriod" startAt="1"/>
             </a:pPr>
             <a:r>
               <a:rPr lang="en-US" sz="3500">
@@ -6037,6 +7178,52 @@
           </a:p>
         </p:txBody>
       </p:sp>
+      <p:sp>
+        <p:nvSpPr>
+          <p:cNvPr name="Freeform 9" id="9"/>
+          <p:cNvSpPr/>
+          <p:nvPr/>
+        </p:nvSpPr>
+        <p:spPr>
+          <a:xfrm flipH="false" flipV="false" rot="0">
+            <a:off x="14714122" y="342716"/>
+            <a:ext cx="3263458" cy="982059"/>
+          </a:xfrm>
+          <a:custGeom>
+            <a:avLst/>
+            <a:gdLst/>
+            <a:ahLst/>
+            <a:cxnLst/>
+            <a:rect r="r" b="b" t="t" l="l"/>
+            <a:pathLst>
+              <a:path h="982059" w="3263458">
+                <a:moveTo>
+                  <a:pt x="0" y="0"/>
+                </a:moveTo>
+                <a:lnTo>
+                  <a:pt x="3263458" y="0"/>
+                </a:lnTo>
+                <a:lnTo>
+                  <a:pt x="3263458" y="982059"/>
+                </a:lnTo>
+                <a:lnTo>
+                  <a:pt x="0" y="982059"/>
+                </a:lnTo>
+                <a:lnTo>
+                  <a:pt x="0" y="0"/>
+                </a:lnTo>
+                <a:close/>
+              </a:path>
+            </a:pathLst>
+          </a:custGeom>
+          <a:blipFill>
+            <a:blip r:embed="rId6"/>
+            <a:stretch>
+              <a:fillRect l="0" t="0" r="0" b="0"/>
+            </a:stretch>
+          </a:blipFill>
+        </p:spPr>
+      </p:sp>
     </p:spTree>
   </p:cSld>
   <p:clrMapOvr>
@@ -6046,7 +7233,7 @@
 </file>
 
 <file path=ppt/slides/slide4.xml><?xml version="1.0" encoding="utf-8"?>
-<p:sld xmlns:a="http://schemas.openxmlformats.org/drawingml/2006/main" xmlns:r="http://schemas.openxmlformats.org/officeDocument/2006/relationships" xmlns:p="http://schemas.openxmlformats.org/presentationml/2006/main">
+<p:sld xmlns:p="http://schemas.openxmlformats.org/presentationml/2006/main" xmlns:a="http://schemas.openxmlformats.org/drawingml/2006/main" xmlns:r="http://schemas.openxmlformats.org/officeDocument/2006/relationships">
   <p:cSld>
     <p:spTree>
       <p:nvGrpSpPr>
@@ -6062,58 +7249,94 @@
           <a:chExt cx="0" cy="0"/>
         </a:xfrm>
       </p:grpSpPr>
-      <p:sp>
-        <p:nvSpPr>
-          <p:cNvPr id="2" name="AutoShape 2"/>
-          <p:cNvSpPr/>
+      <p:grpSp>
+        <p:nvGrpSpPr>
+          <p:cNvPr name="Group 2" id="2"/>
+          <p:cNvGrpSpPr/>
           <p:nvPr/>
-        </p:nvSpPr>
-        <p:spPr>
-          <a:xfrm>
-            <a:off x="1153138" y="1844856"/>
-            <a:ext cx="3792910" cy="0"/>
-          </a:xfrm>
-          <a:prstGeom prst="line">
-            <a:avLst/>
-          </a:prstGeom>
-          <a:ln w="57150" cap="rnd">
-            <a:solidFill>
-              <a:srgbClr val="0B533D"/>
-            </a:solidFill>
-            <a:prstDash val="solid"/>
-            <a:headEnd type="none" w="sm" len="sm"/>
-            <a:tailEnd type="none" w="sm" len="sm"/>
-          </a:ln>
-        </p:spPr>
-      </p:sp>
-      <p:sp>
-        <p:nvSpPr>
-          <p:cNvPr id="3" name="TextBox 3"/>
-          <p:cNvSpPr txBox="1"/>
+        </p:nvGrpSpPr>
+        <p:grpSpPr>
+          <a:xfrm rot="0">
+            <a:off x="1124560" y="1816284"/>
+            <a:ext cx="3850062" cy="57150"/>
+            <a:chOff x="0" y="0"/>
+            <a:chExt cx="5133416" cy="76200"/>
+          </a:xfrm>
+        </p:grpSpPr>
+        <p:sp>
+          <p:nvSpPr>
+            <p:cNvPr name="Freeform 3" id="3"/>
+            <p:cNvSpPr/>
+            <p:nvPr/>
+          </p:nvSpPr>
+          <p:spPr>
+            <a:xfrm flipH="false" flipV="false" rot="0">
+              <a:off x="0" y="0"/>
+              <a:ext cx="5133467" cy="76200"/>
+            </a:xfrm>
+            <a:custGeom>
+              <a:avLst/>
+              <a:gdLst/>
+              <a:ahLst/>
+              <a:cxnLst/>
+              <a:rect r="r" b="b" t="t" l="l"/>
+              <a:pathLst>
+                <a:path h="76200" w="5133467">
+                  <a:moveTo>
+                    <a:pt x="0" y="0"/>
+                  </a:moveTo>
+                  <a:lnTo>
+                    <a:pt x="5133467" y="76200"/>
+                  </a:lnTo>
+                </a:path>
+              </a:pathLst>
+            </a:custGeom>
+            <a:blipFill>
+              <a:blip r:embed="rId3">
+                <a:alphaModFix amt="0"/>
+              </a:blip>
+              <a:stretch>
+                <a:fillRect l="0" t="-1262661" r="0" b="-1262661"/>
+              </a:stretch>
+            </a:blipFill>
+            <a:ln w="57150" cap="sq">
+              <a:solidFill>
+                <a:srgbClr val="0B533D"/>
+              </a:solidFill>
+              <a:prstDash val="solid"/>
+              <a:miter/>
+            </a:ln>
+          </p:spPr>
+        </p:sp>
+      </p:grpSp>
+      <p:sp>
+        <p:nvSpPr>
+          <p:cNvPr name="TextBox 4" id="4"/>
+          <p:cNvSpPr txBox="true"/>
           <p:nvPr/>
         </p:nvSpPr>
         <p:spPr>
-          <a:xfrm>
-            <a:off x="1125311" y="785686"/>
-            <a:ext cx="8671200" cy="790956"/>
+          <a:xfrm rot="0">
+            <a:off x="1125312" y="585664"/>
+            <a:ext cx="8671198" cy="990981"/>
           </a:xfrm>
           <a:prstGeom prst="rect">
             <a:avLst/>
           </a:prstGeom>
         </p:spPr>
         <p:txBody>
-          <a:bodyPr lIns="0" tIns="0" rIns="0" bIns="0" rtlCol="0" anchor="t">
+          <a:bodyPr anchor="t" rtlCol="false" tIns="0" lIns="0" bIns="0" rIns="0">
             <a:spAutoFit/>
           </a:bodyPr>
           <a:lstStyle/>
           <a:p>
             <a:pPr algn="l">
               <a:lnSpc>
-                <a:spcPts val="6552"/>
+                <a:spcPts val="6551"/>
               </a:lnSpc>
             </a:pPr>
             <a:r>
-              <a:rPr lang="en-US" sz="3900" b="1">
+              <a:rPr lang="en-US" sz="3900" b="true">
                 <a:solidFill>
                   <a:srgbClr val="000000"/>
                 </a:solidFill>
@@ -6129,21 +7352,21 @@
       </p:sp>
       <p:sp>
         <p:nvSpPr>
-          <p:cNvPr id="4" name="TextBox 4"/>
-          <p:cNvSpPr txBox="1"/>
+          <p:cNvPr name="TextBox 5" id="5"/>
+          <p:cNvSpPr txBox="true"/>
           <p:nvPr/>
         </p:nvSpPr>
         <p:spPr>
-          <a:xfrm>
-            <a:off x="17289375" y="9639393"/>
-            <a:ext cx="784800" cy="389775"/>
+          <a:xfrm rot="0">
+            <a:off x="17289370" y="9572720"/>
+            <a:ext cx="784803" cy="456448"/>
           </a:xfrm>
           <a:prstGeom prst="rect">
             <a:avLst/>
           </a:prstGeom>
         </p:spPr>
         <p:txBody>
-          <a:bodyPr lIns="0" tIns="0" rIns="0" bIns="0" rtlCol="0" anchor="t">
+          <a:bodyPr anchor="t" rtlCol="false" tIns="0" lIns="0" bIns="0" rIns="0">
             <a:spAutoFit/>
           </a:bodyPr>
           <a:lstStyle/>
@@ -6170,34 +7393,34 @@
       </p:sp>
       <p:sp>
         <p:nvSpPr>
-          <p:cNvPr id="5" name="Freeform 5"/>
+          <p:cNvPr name="Freeform 6" id="6"/>
           <p:cNvSpPr/>
           <p:nvPr/>
         </p:nvSpPr>
         <p:spPr>
-          <a:xfrm>
-            <a:off x="13657487" y="437420"/>
-            <a:ext cx="4173313" cy="1270252"/>
+          <a:xfrm flipH="false" flipV="false" rot="0">
+            <a:off x="0" y="9424245"/>
+            <a:ext cx="18288000" cy="862755"/>
           </a:xfrm>
           <a:custGeom>
             <a:avLst/>
             <a:gdLst/>
             <a:ahLst/>
             <a:cxnLst/>
-            <a:rect l="l" t="t" r="r" b="b"/>
+            <a:rect r="r" b="b" t="t" l="l"/>
             <a:pathLst>
-              <a:path w="4173313" h="1270252">
+              <a:path h="862755" w="18288000">
                 <a:moveTo>
                   <a:pt x="0" y="0"/>
                 </a:moveTo>
                 <a:lnTo>
-                  <a:pt x="4173313" y="0"/>
+                  <a:pt x="18288000" y="0"/>
                 </a:lnTo>
                 <a:lnTo>
-                  <a:pt x="4173313" y="1270252"/>
+                  <a:pt x="18288000" y="862755"/>
                 </a:lnTo>
                 <a:lnTo>
-                  <a:pt x="0" y="1270252"/>
+                  <a:pt x="0" y="862755"/>
                 </a:lnTo>
                 <a:lnTo>
                   <a:pt x="0" y="0"/>
@@ -6207,113 +7430,36 @@
             </a:pathLst>
           </a:custGeom>
           <a:blipFill>
-            <a:blip r:embed="rId3"/>
+            <a:blip r:embed="rId4">
+              <a:extLst>
+                <a:ext uri="{96DAC541-7B7A-43D3-8B79-37D633B846F1}">
+                  <asvg:svgBlip xmlns:asvg="http://schemas.microsoft.com/office/drawing/2016/SVG/main" r:embed="rId5"/>
+                </a:ext>
+              </a:extLst>
+            </a:blip>
             <a:stretch>
-              <a:fillRect/>
+              <a:fillRect l="0" t="0" r="0" b="0"/>
             </a:stretch>
           </a:blipFill>
         </p:spPr>
       </p:sp>
-      <p:grpSp>
-        <p:nvGrpSpPr>
-          <p:cNvPr id="6" name="Group 6"/>
-          <p:cNvGrpSpPr/>
+      <p:sp>
+        <p:nvSpPr>
+          <p:cNvPr name="TextBox 7" id="7"/>
+          <p:cNvSpPr txBox="true"/>
           <p:nvPr/>
-        </p:nvGrpSpPr>
-        <p:grpSpPr>
-          <a:xfrm>
-            <a:off x="0" y="9677400"/>
-            <a:ext cx="18288000" cy="609600"/>
-            <a:chOff x="0" y="0"/>
-            <a:chExt cx="4816593" cy="160553"/>
-          </a:xfrm>
-        </p:grpSpPr>
-        <p:sp>
-          <p:nvSpPr>
-            <p:cNvPr id="7" name="Freeform 7"/>
-            <p:cNvSpPr/>
-            <p:nvPr/>
-          </p:nvSpPr>
-          <p:spPr>
-            <a:xfrm>
-              <a:off x="0" y="0"/>
-              <a:ext cx="4816592" cy="160553"/>
-            </a:xfrm>
-            <a:custGeom>
-              <a:avLst/>
-              <a:gdLst/>
-              <a:ahLst/>
-              <a:cxnLst/>
-              <a:rect l="l" t="t" r="r" b="b"/>
-              <a:pathLst>
-                <a:path w="4816592" h="160553">
-                  <a:moveTo>
-                    <a:pt x="0" y="0"/>
-                  </a:moveTo>
-                  <a:lnTo>
-                    <a:pt x="4816592" y="0"/>
-                  </a:lnTo>
-                  <a:lnTo>
-                    <a:pt x="4816592" y="160553"/>
-                  </a:lnTo>
-                  <a:lnTo>
-                    <a:pt x="0" y="160553"/>
-                  </a:lnTo>
-                  <a:close/>
-                </a:path>
-              </a:pathLst>
-            </a:custGeom>
-            <a:solidFill>
-              <a:srgbClr val="39FF5F"/>
-            </a:solidFill>
-          </p:spPr>
-        </p:sp>
-        <p:sp>
-          <p:nvSpPr>
-            <p:cNvPr id="8" name="TextBox 8"/>
-            <p:cNvSpPr txBox="1"/>
-            <p:nvPr/>
-          </p:nvSpPr>
-          <p:spPr>
-            <a:xfrm>
-              <a:off x="0" y="-66675"/>
-              <a:ext cx="4816593" cy="227228"/>
-            </a:xfrm>
-            <a:prstGeom prst="rect">
-              <a:avLst/>
-            </a:prstGeom>
-          </p:spPr>
-          <p:txBody>
-            <a:bodyPr lIns="50800" tIns="50800" rIns="50800" bIns="50800" rtlCol="0" anchor="ctr"/>
-            <a:lstStyle/>
-            <a:p>
-              <a:pPr algn="ctr">
-                <a:lnSpc>
-                  <a:spcPts val="3024"/>
-                </a:lnSpc>
-              </a:pPr>
-              <a:endParaRPr/>
-            </a:p>
-          </p:txBody>
-        </p:sp>
-      </p:grpSp>
-      <p:sp>
-        <p:nvSpPr>
-          <p:cNvPr id="9" name="TextBox 9"/>
-          <p:cNvSpPr txBox="1"/>
-          <p:nvPr/>
-        </p:nvSpPr>
-        <p:spPr>
-          <a:xfrm>
-            <a:off x="6208849" y="9741484"/>
-            <a:ext cx="5346634" cy="415370"/>
+        </p:nvSpPr>
+        <p:spPr>
+          <a:xfrm rot="0">
+            <a:off x="6208852" y="9703384"/>
+            <a:ext cx="5346630" cy="453466"/>
           </a:xfrm>
           <a:prstGeom prst="rect">
             <a:avLst/>
           </a:prstGeom>
         </p:spPr>
         <p:txBody>
-          <a:bodyPr lIns="0" tIns="0" rIns="0" bIns="0" rtlCol="0" anchor="t">
+          <a:bodyPr anchor="t" rtlCol="false" tIns="0" lIns="0" bIns="0" rIns="0">
             <a:spAutoFit/>
           </a:bodyPr>
           <a:lstStyle/>
@@ -6324,9 +7470,9 @@
               </a:lnSpc>
             </a:pPr>
             <a:r>
-              <a:rPr lang="en-US" sz="2700" dirty="0">
+              <a:rPr lang="en-US" sz="2700">
                 <a:solidFill>
-                  <a:srgbClr val="000000"/>
+                  <a:srgbClr val="FFFFFF"/>
                 </a:solidFill>
                 <a:latin typeface="Cambria"/>
                 <a:ea typeface="Cambria"/>
@@ -6340,30 +7486,30 @@
       </p:sp>
       <p:sp>
         <p:nvSpPr>
-          <p:cNvPr id="10" name="TextBox 10"/>
-          <p:cNvSpPr txBox="1"/>
+          <p:cNvPr name="TextBox 8" id="8"/>
+          <p:cNvSpPr txBox="true"/>
           <p:nvPr/>
         </p:nvSpPr>
         <p:spPr>
-          <a:xfrm>
-            <a:off x="1028700" y="3030609"/>
-            <a:ext cx="16556475" cy="3194050"/>
+          <a:xfrm rot="0">
+            <a:off x="1028700" y="2573407"/>
+            <a:ext cx="16556479" cy="3651247"/>
           </a:xfrm>
           <a:prstGeom prst="rect">
             <a:avLst/>
           </a:prstGeom>
         </p:spPr>
         <p:txBody>
-          <a:bodyPr lIns="0" tIns="0" rIns="0" bIns="0" rtlCol="0" anchor="t">
+          <a:bodyPr anchor="t" rtlCol="false" tIns="0" lIns="0" bIns="0" rIns="0">
             <a:spAutoFit/>
           </a:bodyPr>
           <a:lstStyle/>
           <a:p>
-            <a:pPr marL="755651" lvl="1" indent="-377825" algn="l">
+            <a:pPr algn="l" marL="800101" indent="-266700" lvl="2">
               <a:lnSpc>
                 <a:spcPts val="8750"/>
               </a:lnSpc>
-              <a:buAutoNum type="arabicPeriod"/>
+              <a:buAutoNum type="arabicPeriod" startAt="1"/>
             </a:pPr>
             <a:r>
               <a:rPr lang="en-US" sz="3500">
@@ -6379,11 +7525,11 @@
             </a:r>
           </a:p>
           <a:p>
-            <a:pPr marL="755651" lvl="1" indent="-377825" algn="l">
+            <a:pPr algn="l" marL="800101" indent="-266700" lvl="2">
               <a:lnSpc>
                 <a:spcPts val="8750"/>
               </a:lnSpc>
-              <a:buAutoNum type="arabicPeriod"/>
+              <a:buAutoNum type="arabicPeriod" startAt="1"/>
             </a:pPr>
             <a:r>
               <a:rPr lang="en-US" sz="3500">
@@ -6399,11 +7545,11 @@
             </a:r>
           </a:p>
           <a:p>
-            <a:pPr marL="755651" lvl="1" indent="-377825" algn="l">
+            <a:pPr algn="l" marL="800101" indent="-266700" lvl="2">
               <a:lnSpc>
                 <a:spcPts val="8750"/>
               </a:lnSpc>
-              <a:buAutoNum type="arabicPeriod"/>
+              <a:buAutoNum type="arabicPeriod" startAt="1"/>
             </a:pPr>
             <a:r>
               <a:rPr lang="en-US" sz="3500">
@@ -6420,6 +7566,52 @@
           </a:p>
         </p:txBody>
       </p:sp>
+      <p:sp>
+        <p:nvSpPr>
+          <p:cNvPr name="Freeform 9" id="9"/>
+          <p:cNvSpPr/>
+          <p:nvPr/>
+        </p:nvSpPr>
+        <p:spPr>
+          <a:xfrm flipH="false" flipV="false" rot="0">
+            <a:off x="14714122" y="342716"/>
+            <a:ext cx="3263458" cy="982059"/>
+          </a:xfrm>
+          <a:custGeom>
+            <a:avLst/>
+            <a:gdLst/>
+            <a:ahLst/>
+            <a:cxnLst/>
+            <a:rect r="r" b="b" t="t" l="l"/>
+            <a:pathLst>
+              <a:path h="982059" w="3263458">
+                <a:moveTo>
+                  <a:pt x="0" y="0"/>
+                </a:moveTo>
+                <a:lnTo>
+                  <a:pt x="3263458" y="0"/>
+                </a:lnTo>
+                <a:lnTo>
+                  <a:pt x="3263458" y="982059"/>
+                </a:lnTo>
+                <a:lnTo>
+                  <a:pt x="0" y="982059"/>
+                </a:lnTo>
+                <a:lnTo>
+                  <a:pt x="0" y="0"/>
+                </a:lnTo>
+                <a:close/>
+              </a:path>
+            </a:pathLst>
+          </a:custGeom>
+          <a:blipFill>
+            <a:blip r:embed="rId6"/>
+            <a:stretch>
+              <a:fillRect l="0" t="0" r="0" b="0"/>
+            </a:stretch>
+          </a:blipFill>
+        </p:spPr>
+      </p:sp>
     </p:spTree>
   </p:cSld>
   <p:clrMapOvr>
@@ -6429,7 +7621,7 @@
 </file>
 
 <file path=ppt/slides/slide5.xml><?xml version="1.0" encoding="utf-8"?>
-<p:sld xmlns:a="http://schemas.openxmlformats.org/drawingml/2006/main" xmlns:r="http://schemas.openxmlformats.org/officeDocument/2006/relationships" xmlns:p="http://schemas.openxmlformats.org/presentationml/2006/main">
+<p:sld xmlns:p="http://schemas.openxmlformats.org/presentationml/2006/main" xmlns:a="http://schemas.openxmlformats.org/drawingml/2006/main" xmlns:r="http://schemas.openxmlformats.org/officeDocument/2006/relationships">
   <p:cSld>
     <p:spTree>
       <p:nvGrpSpPr>
@@ -6445,58 +7637,94 @@
           <a:chExt cx="0" cy="0"/>
         </a:xfrm>
       </p:grpSpPr>
-      <p:sp>
-        <p:nvSpPr>
-          <p:cNvPr id="2" name="AutoShape 2"/>
-          <p:cNvSpPr/>
+      <p:grpSp>
+        <p:nvGrpSpPr>
+          <p:cNvPr name="Group 2" id="2"/>
+          <p:cNvGrpSpPr/>
           <p:nvPr/>
-        </p:nvSpPr>
-        <p:spPr>
-          <a:xfrm rot="76298">
-            <a:off x="1152715" y="1854381"/>
-            <a:ext cx="3433585" cy="0"/>
-          </a:xfrm>
-          <a:prstGeom prst="line">
-            <a:avLst/>
-          </a:prstGeom>
-          <a:ln w="57150" cap="rnd">
-            <a:solidFill>
-              <a:srgbClr val="0B533D"/>
-            </a:solidFill>
-            <a:prstDash val="solid"/>
-            <a:headEnd type="none" w="sm" len="sm"/>
-            <a:tailEnd type="none" w="sm" len="sm"/>
-          </a:ln>
-        </p:spPr>
-      </p:sp>
-      <p:sp>
-        <p:nvSpPr>
-          <p:cNvPr id="3" name="TextBox 3"/>
-          <p:cNvSpPr txBox="1"/>
+        </p:nvGrpSpPr>
+        <p:grpSpPr>
+          <a:xfrm rot="76320">
+            <a:off x="1124140" y="1825809"/>
+            <a:ext cx="3490732" cy="57150"/>
+            <a:chOff x="0" y="0"/>
+            <a:chExt cx="4654309" cy="76200"/>
+          </a:xfrm>
+        </p:grpSpPr>
+        <p:sp>
+          <p:nvSpPr>
+            <p:cNvPr name="Freeform 3" id="3"/>
+            <p:cNvSpPr/>
+            <p:nvPr/>
+          </p:nvSpPr>
+          <p:spPr>
+            <a:xfrm flipH="false" flipV="false" rot="0">
+              <a:off x="0" y="0"/>
+              <a:ext cx="4654296" cy="76200"/>
+            </a:xfrm>
+            <a:custGeom>
+              <a:avLst/>
+              <a:gdLst/>
+              <a:ahLst/>
+              <a:cxnLst/>
+              <a:rect r="r" b="b" t="t" l="l"/>
+              <a:pathLst>
+                <a:path h="76200" w="4654296">
+                  <a:moveTo>
+                    <a:pt x="0" y="0"/>
+                  </a:moveTo>
+                  <a:lnTo>
+                    <a:pt x="4654296" y="76200"/>
+                  </a:lnTo>
+                </a:path>
+              </a:pathLst>
+            </a:custGeom>
+            <a:blipFill>
+              <a:blip r:embed="rId3">
+                <a:alphaModFix amt="0"/>
+              </a:blip>
+              <a:stretch>
+                <a:fillRect l="0" t="-1140149" r="0" b="-1140149"/>
+              </a:stretch>
+            </a:blipFill>
+            <a:ln w="57150" cap="sq">
+              <a:solidFill>
+                <a:srgbClr val="0B533D"/>
+              </a:solidFill>
+              <a:prstDash val="solid"/>
+              <a:miter/>
+            </a:ln>
+          </p:spPr>
+        </p:sp>
+      </p:grpSp>
+      <p:sp>
+        <p:nvSpPr>
+          <p:cNvPr name="TextBox 4" id="4"/>
+          <p:cNvSpPr txBox="true"/>
           <p:nvPr/>
         </p:nvSpPr>
         <p:spPr>
-          <a:xfrm>
-            <a:off x="1125311" y="785686"/>
-            <a:ext cx="8671200" cy="790956"/>
+          <a:xfrm rot="0">
+            <a:off x="1125312" y="585664"/>
+            <a:ext cx="8671198" cy="990981"/>
           </a:xfrm>
           <a:prstGeom prst="rect">
             <a:avLst/>
           </a:prstGeom>
         </p:spPr>
         <p:txBody>
-          <a:bodyPr lIns="0" tIns="0" rIns="0" bIns="0" rtlCol="0" anchor="t">
+          <a:bodyPr anchor="t" rtlCol="false" tIns="0" lIns="0" bIns="0" rIns="0">
             <a:spAutoFit/>
           </a:bodyPr>
           <a:lstStyle/>
           <a:p>
             <a:pPr algn="l">
               <a:lnSpc>
-                <a:spcPts val="6552"/>
+                <a:spcPts val="6551"/>
               </a:lnSpc>
             </a:pPr>
             <a:r>
-              <a:rPr lang="en-US" sz="3900" b="1">
+              <a:rPr lang="en-US" sz="3900" b="true">
                 <a:solidFill>
                   <a:srgbClr val="000000"/>
                 </a:solidFill>
@@ -6512,21 +7740,21 @@
       </p:sp>
       <p:sp>
         <p:nvSpPr>
-          <p:cNvPr id="4" name="TextBox 4"/>
-          <p:cNvSpPr txBox="1"/>
+          <p:cNvPr name="TextBox 5" id="5"/>
+          <p:cNvSpPr txBox="true"/>
           <p:nvPr/>
         </p:nvSpPr>
         <p:spPr>
-          <a:xfrm>
-            <a:off x="17289375" y="9639393"/>
-            <a:ext cx="784800" cy="389775"/>
+          <a:xfrm rot="0">
+            <a:off x="17289370" y="9572720"/>
+            <a:ext cx="784803" cy="456448"/>
           </a:xfrm>
           <a:prstGeom prst="rect">
             <a:avLst/>
           </a:prstGeom>
         </p:spPr>
         <p:txBody>
-          <a:bodyPr lIns="0" tIns="0" rIns="0" bIns="0" rtlCol="0" anchor="t">
+          <a:bodyPr anchor="t" rtlCol="false" tIns="0" lIns="0" bIns="0" rIns="0">
             <a:spAutoFit/>
           </a:bodyPr>
           <a:lstStyle/>
@@ -6553,34 +7781,34 @@
       </p:sp>
       <p:sp>
         <p:nvSpPr>
-          <p:cNvPr id="5" name="Freeform 5"/>
+          <p:cNvPr name="Freeform 6" id="6"/>
           <p:cNvSpPr/>
           <p:nvPr/>
         </p:nvSpPr>
         <p:spPr>
-          <a:xfrm>
-            <a:off x="13657487" y="437420"/>
-            <a:ext cx="4173313" cy="1270252"/>
+          <a:xfrm flipH="false" flipV="false" rot="0">
+            <a:off x="0" y="9424245"/>
+            <a:ext cx="18288000" cy="862755"/>
           </a:xfrm>
           <a:custGeom>
             <a:avLst/>
             <a:gdLst/>
             <a:ahLst/>
             <a:cxnLst/>
-            <a:rect l="l" t="t" r="r" b="b"/>
+            <a:rect r="r" b="b" t="t" l="l"/>
             <a:pathLst>
-              <a:path w="4173313" h="1270252">
+              <a:path h="862755" w="18288000">
                 <a:moveTo>
                   <a:pt x="0" y="0"/>
                 </a:moveTo>
                 <a:lnTo>
-                  <a:pt x="4173313" y="0"/>
+                  <a:pt x="18288000" y="0"/>
                 </a:lnTo>
                 <a:lnTo>
-                  <a:pt x="4173313" y="1270252"/>
+                  <a:pt x="18288000" y="862755"/>
                 </a:lnTo>
                 <a:lnTo>
-                  <a:pt x="0" y="1270252"/>
+                  <a:pt x="0" y="862755"/>
                 </a:lnTo>
                 <a:lnTo>
                   <a:pt x="0" y="0"/>
@@ -6590,113 +7818,36 @@
             </a:pathLst>
           </a:custGeom>
           <a:blipFill>
-            <a:blip r:embed="rId3"/>
+            <a:blip r:embed="rId4">
+              <a:extLst>
+                <a:ext uri="{96DAC541-7B7A-43D3-8B79-37D633B846F1}">
+                  <asvg:svgBlip xmlns:asvg="http://schemas.microsoft.com/office/drawing/2016/SVG/main" r:embed="rId5"/>
+                </a:ext>
+              </a:extLst>
+            </a:blip>
             <a:stretch>
-              <a:fillRect/>
+              <a:fillRect l="0" t="0" r="0" b="0"/>
             </a:stretch>
           </a:blipFill>
         </p:spPr>
       </p:sp>
-      <p:grpSp>
-        <p:nvGrpSpPr>
-          <p:cNvPr id="6" name="Group 6"/>
-          <p:cNvGrpSpPr/>
+      <p:sp>
+        <p:nvSpPr>
+          <p:cNvPr name="TextBox 7" id="7"/>
+          <p:cNvSpPr txBox="true"/>
           <p:nvPr/>
-        </p:nvGrpSpPr>
-        <p:grpSpPr>
-          <a:xfrm>
-            <a:off x="0" y="9677400"/>
-            <a:ext cx="18288000" cy="609600"/>
-            <a:chOff x="0" y="0"/>
-            <a:chExt cx="4816593" cy="160553"/>
-          </a:xfrm>
-        </p:grpSpPr>
-        <p:sp>
-          <p:nvSpPr>
-            <p:cNvPr id="7" name="Freeform 7"/>
-            <p:cNvSpPr/>
-            <p:nvPr/>
-          </p:nvSpPr>
-          <p:spPr>
-            <a:xfrm>
-              <a:off x="0" y="0"/>
-              <a:ext cx="4816592" cy="160553"/>
-            </a:xfrm>
-            <a:custGeom>
-              <a:avLst/>
-              <a:gdLst/>
-              <a:ahLst/>
-              <a:cxnLst/>
-              <a:rect l="l" t="t" r="r" b="b"/>
-              <a:pathLst>
-                <a:path w="4816592" h="160553">
-                  <a:moveTo>
-                    <a:pt x="0" y="0"/>
-                  </a:moveTo>
-                  <a:lnTo>
-                    <a:pt x="4816592" y="0"/>
-                  </a:lnTo>
-                  <a:lnTo>
-                    <a:pt x="4816592" y="160553"/>
-                  </a:lnTo>
-                  <a:lnTo>
-                    <a:pt x="0" y="160553"/>
-                  </a:lnTo>
-                  <a:close/>
-                </a:path>
-              </a:pathLst>
-            </a:custGeom>
-            <a:solidFill>
-              <a:srgbClr val="39FF5F"/>
-            </a:solidFill>
-          </p:spPr>
-        </p:sp>
-        <p:sp>
-          <p:nvSpPr>
-            <p:cNvPr id="8" name="TextBox 8"/>
-            <p:cNvSpPr txBox="1"/>
-            <p:nvPr/>
-          </p:nvSpPr>
-          <p:spPr>
-            <a:xfrm>
-              <a:off x="0" y="-66675"/>
-              <a:ext cx="4816593" cy="227228"/>
-            </a:xfrm>
-            <a:prstGeom prst="rect">
-              <a:avLst/>
-            </a:prstGeom>
-          </p:spPr>
-          <p:txBody>
-            <a:bodyPr lIns="50800" tIns="50800" rIns="50800" bIns="50800" rtlCol="0" anchor="ctr"/>
-            <a:lstStyle/>
-            <a:p>
-              <a:pPr algn="ctr">
-                <a:lnSpc>
-                  <a:spcPts val="3024"/>
-                </a:lnSpc>
-              </a:pPr>
-              <a:endParaRPr/>
-            </a:p>
-          </p:txBody>
-        </p:sp>
-      </p:grpSp>
-      <p:sp>
-        <p:nvSpPr>
-          <p:cNvPr id="9" name="TextBox 9"/>
-          <p:cNvSpPr txBox="1"/>
-          <p:nvPr/>
-        </p:nvSpPr>
-        <p:spPr>
-          <a:xfrm>
-            <a:off x="6208849" y="9741484"/>
-            <a:ext cx="5346634" cy="415370"/>
+        </p:nvSpPr>
+        <p:spPr>
+          <a:xfrm rot="0">
+            <a:off x="6208852" y="9703384"/>
+            <a:ext cx="5346630" cy="453466"/>
           </a:xfrm>
           <a:prstGeom prst="rect">
             <a:avLst/>
           </a:prstGeom>
         </p:spPr>
         <p:txBody>
-          <a:bodyPr lIns="0" tIns="0" rIns="0" bIns="0" rtlCol="0" anchor="t">
+          <a:bodyPr anchor="t" rtlCol="false" tIns="0" lIns="0" bIns="0" rIns="0">
             <a:spAutoFit/>
           </a:bodyPr>
           <a:lstStyle/>
@@ -6707,9 +7858,9 @@
               </a:lnSpc>
             </a:pPr>
             <a:r>
-              <a:rPr lang="en-US" sz="2700" dirty="0">
+              <a:rPr lang="en-US" sz="2700">
                 <a:solidFill>
-                  <a:srgbClr val="000000"/>
+                  <a:srgbClr val="FFFFFF"/>
                 </a:solidFill>
                 <a:latin typeface="Cambria"/>
                 <a:ea typeface="Cambria"/>
@@ -6723,30 +7874,30 @@
       </p:sp>
       <p:sp>
         <p:nvSpPr>
-          <p:cNvPr id="10" name="TextBox 10"/>
-          <p:cNvSpPr txBox="1"/>
+          <p:cNvPr name="TextBox 8" id="8"/>
+          <p:cNvSpPr txBox="true"/>
           <p:nvPr/>
         </p:nvSpPr>
         <p:spPr>
-          <a:xfrm>
-            <a:off x="1028700" y="3030609"/>
-            <a:ext cx="16556475" cy="2089150"/>
+          <a:xfrm rot="0">
+            <a:off x="1028700" y="2573407"/>
+            <a:ext cx="16556479" cy="2546347"/>
           </a:xfrm>
           <a:prstGeom prst="rect">
             <a:avLst/>
           </a:prstGeom>
         </p:spPr>
         <p:txBody>
-          <a:bodyPr lIns="0" tIns="0" rIns="0" bIns="0" rtlCol="0" anchor="t">
+          <a:bodyPr anchor="t" rtlCol="false" tIns="0" lIns="0" bIns="0" rIns="0">
             <a:spAutoFit/>
           </a:bodyPr>
           <a:lstStyle/>
           <a:p>
-            <a:pPr marL="755651" lvl="1" indent="-377825" algn="l">
+            <a:pPr algn="l" marL="800101" indent="-266700" lvl="2">
               <a:lnSpc>
                 <a:spcPts val="8750"/>
               </a:lnSpc>
-              <a:buAutoNum type="arabicPeriod"/>
+              <a:buAutoNum type="arabicPeriod" startAt="1"/>
             </a:pPr>
             <a:r>
               <a:rPr lang="en-US" sz="3500">
@@ -6762,11 +7913,11 @@
             </a:r>
           </a:p>
           <a:p>
-            <a:pPr marL="755651" lvl="1" indent="-377825" algn="l">
+            <a:pPr algn="l" marL="800101" indent="-266700" lvl="2">
               <a:lnSpc>
                 <a:spcPts val="8750"/>
               </a:lnSpc>
-              <a:buAutoNum type="arabicPeriod"/>
+              <a:buAutoNum type="arabicPeriod" startAt="1"/>
             </a:pPr>
             <a:r>
               <a:rPr lang="en-US" sz="3500">
@@ -6783,6 +7934,52 @@
           </a:p>
         </p:txBody>
       </p:sp>
+      <p:sp>
+        <p:nvSpPr>
+          <p:cNvPr name="Freeform 9" id="9"/>
+          <p:cNvSpPr/>
+          <p:nvPr/>
+        </p:nvSpPr>
+        <p:spPr>
+          <a:xfrm flipH="false" flipV="false" rot="0">
+            <a:off x="14714122" y="342716"/>
+            <a:ext cx="3263458" cy="982059"/>
+          </a:xfrm>
+          <a:custGeom>
+            <a:avLst/>
+            <a:gdLst/>
+            <a:ahLst/>
+            <a:cxnLst/>
+            <a:rect r="r" b="b" t="t" l="l"/>
+            <a:pathLst>
+              <a:path h="982059" w="3263458">
+                <a:moveTo>
+                  <a:pt x="0" y="0"/>
+                </a:moveTo>
+                <a:lnTo>
+                  <a:pt x="3263458" y="0"/>
+                </a:lnTo>
+                <a:lnTo>
+                  <a:pt x="3263458" y="982059"/>
+                </a:lnTo>
+                <a:lnTo>
+                  <a:pt x="0" y="982059"/>
+                </a:lnTo>
+                <a:lnTo>
+                  <a:pt x="0" y="0"/>
+                </a:lnTo>
+                <a:close/>
+              </a:path>
+            </a:pathLst>
+          </a:custGeom>
+          <a:blipFill>
+            <a:blip r:embed="rId6"/>
+            <a:stretch>
+              <a:fillRect l="0" t="0" r="0" b="0"/>
+            </a:stretch>
+          </a:blipFill>
+        </p:spPr>
+      </p:sp>
     </p:spTree>
   </p:cSld>
   <p:clrMapOvr>
@@ -6792,7 +7989,7 @@
 </file>
 
 <file path=ppt/slides/slide6.xml><?xml version="1.0" encoding="utf-8"?>
-<p:sld xmlns:a="http://schemas.openxmlformats.org/drawingml/2006/main" xmlns:r="http://schemas.openxmlformats.org/officeDocument/2006/relationships" xmlns:p="http://schemas.openxmlformats.org/presentationml/2006/main">
+<p:sld xmlns:p="http://schemas.openxmlformats.org/presentationml/2006/main" xmlns:a="http://schemas.openxmlformats.org/drawingml/2006/main" xmlns:r="http://schemas.openxmlformats.org/officeDocument/2006/relationships">
   <p:cSld>
     <p:spTree>
       <p:nvGrpSpPr>
@@ -6808,47 +8005,83 @@
           <a:chExt cx="0" cy="0"/>
         </a:xfrm>
       </p:grpSpPr>
-      <p:sp>
-        <p:nvSpPr>
-          <p:cNvPr id="2" name="AutoShape 2"/>
-          <p:cNvSpPr/>
+      <p:grpSp>
+        <p:nvGrpSpPr>
+          <p:cNvPr name="Group 2" id="2"/>
+          <p:cNvGrpSpPr/>
           <p:nvPr/>
-        </p:nvSpPr>
-        <p:spPr>
-          <a:xfrm rot="76301">
-            <a:off x="1312157" y="2578281"/>
-            <a:ext cx="3433446" cy="0"/>
-          </a:xfrm>
-          <a:prstGeom prst="line">
-            <a:avLst/>
-          </a:prstGeom>
-          <a:ln w="57150" cap="rnd">
-            <a:solidFill>
-              <a:srgbClr val="0B533D"/>
-            </a:solidFill>
-            <a:prstDash val="solid"/>
-            <a:headEnd type="none" w="sm" len="sm"/>
-            <a:tailEnd type="none" w="sm" len="sm"/>
-          </a:ln>
-        </p:spPr>
-      </p:sp>
-      <p:sp>
-        <p:nvSpPr>
-          <p:cNvPr id="3" name="TextBox 3"/>
-          <p:cNvSpPr txBox="1"/>
+        </p:nvGrpSpPr>
+        <p:grpSpPr>
+          <a:xfrm rot="76320">
+            <a:off x="1283579" y="2549709"/>
+            <a:ext cx="3490598" cy="57150"/>
+            <a:chOff x="0" y="0"/>
+            <a:chExt cx="4654131" cy="76200"/>
+          </a:xfrm>
+        </p:grpSpPr>
+        <p:sp>
+          <p:nvSpPr>
+            <p:cNvPr name="Freeform 3" id="3"/>
+            <p:cNvSpPr/>
+            <p:nvPr/>
+          </p:nvSpPr>
+          <p:spPr>
+            <a:xfrm flipH="false" flipV="false" rot="0">
+              <a:off x="0" y="0"/>
+              <a:ext cx="4654169" cy="76200"/>
+            </a:xfrm>
+            <a:custGeom>
+              <a:avLst/>
+              <a:gdLst/>
+              <a:ahLst/>
+              <a:cxnLst/>
+              <a:rect r="r" b="b" t="t" l="l"/>
+              <a:pathLst>
+                <a:path h="76200" w="4654169">
+                  <a:moveTo>
+                    <a:pt x="0" y="0"/>
+                  </a:moveTo>
+                  <a:lnTo>
+                    <a:pt x="4654169" y="76200"/>
+                  </a:lnTo>
+                </a:path>
+              </a:pathLst>
+            </a:custGeom>
+            <a:blipFill>
+              <a:blip r:embed="rId3">
+                <a:alphaModFix amt="0"/>
+              </a:blip>
+              <a:stretch>
+                <a:fillRect l="0" t="-1140103" r="0" b="-1140103"/>
+              </a:stretch>
+            </a:blipFill>
+            <a:ln w="57150" cap="sq">
+              <a:solidFill>
+                <a:srgbClr val="0B533D"/>
+              </a:solidFill>
+              <a:prstDash val="solid"/>
+              <a:miter/>
+            </a:ln>
+          </p:spPr>
+        </p:sp>
+      </p:grpSp>
+      <p:sp>
+        <p:nvSpPr>
+          <p:cNvPr name="TextBox 4" id="4"/>
+          <p:cNvSpPr txBox="true"/>
           <p:nvPr/>
         </p:nvSpPr>
         <p:spPr>
-          <a:xfrm>
-            <a:off x="1446034" y="1299545"/>
-            <a:ext cx="9926261" cy="935344"/>
+          <a:xfrm rot="0">
+            <a:off x="1446038" y="1223343"/>
+            <a:ext cx="9926260" cy="1011545"/>
           </a:xfrm>
           <a:prstGeom prst="rect">
             <a:avLst/>
           </a:prstGeom>
         </p:spPr>
         <p:txBody>
-          <a:bodyPr lIns="0" tIns="0" rIns="0" bIns="0" rtlCol="0" anchor="t">
+          <a:bodyPr anchor="t" rtlCol="false" tIns="0" lIns="0" bIns="0" rIns="0">
             <a:spAutoFit/>
           </a:bodyPr>
           <a:lstStyle/>
@@ -6859,7 +8092,7 @@
               </a:lnSpc>
             </a:pPr>
             <a:r>
-              <a:rPr lang="en-US" sz="6600" b="1">
+              <a:rPr lang="en-US" sz="6600" b="true">
                 <a:solidFill>
                   <a:srgbClr val="000000"/>
                 </a:solidFill>
@@ -6875,32 +8108,32 @@
       </p:sp>
       <p:sp>
         <p:nvSpPr>
-          <p:cNvPr id="4" name="TextBox 4"/>
-          <p:cNvSpPr txBox="1"/>
+          <p:cNvPr name="TextBox 5" id="5"/>
+          <p:cNvSpPr txBox="true"/>
           <p:nvPr/>
         </p:nvSpPr>
         <p:spPr>
-          <a:xfrm>
-            <a:off x="1446034" y="2635424"/>
-            <a:ext cx="5448256" cy="6622876"/>
+          <a:xfrm rot="0">
+            <a:off x="1446038" y="2292525"/>
+            <a:ext cx="5448252" cy="6965775"/>
           </a:xfrm>
           <a:prstGeom prst="rect">
             <a:avLst/>
           </a:prstGeom>
         </p:spPr>
         <p:txBody>
-          <a:bodyPr lIns="0" tIns="0" rIns="0" bIns="0" rtlCol="0" anchor="t">
+          <a:bodyPr anchor="t" rtlCol="false" tIns="0" lIns="0" bIns="0" rIns="0">
             <a:spAutoFit/>
           </a:bodyPr>
           <a:lstStyle/>
           <a:p>
             <a:pPr algn="l">
               <a:lnSpc>
-                <a:spcPts val="6659"/>
+                <a:spcPts val="6657"/>
               </a:lnSpc>
             </a:pPr>
             <a:r>
-              <a:rPr lang="en-US" sz="2663" b="1">
+              <a:rPr lang="en-US" sz="2662" b="true">
                 <a:solidFill>
                   <a:srgbClr val="0B533D"/>
                 </a:solidFill>
@@ -6915,11 +8148,11 @@
           <a:p>
             <a:pPr algn="l">
               <a:lnSpc>
-                <a:spcPts val="6659"/>
+                <a:spcPts val="6657"/>
               </a:lnSpc>
             </a:pPr>
             <a:r>
-              <a:rPr lang="en-US" sz="2663">
+              <a:rPr lang="en-US" sz="2662">
                 <a:solidFill>
                   <a:srgbClr val="000000"/>
                 </a:solidFill>
@@ -6934,11 +8167,11 @@
           <a:p>
             <a:pPr algn="l">
               <a:lnSpc>
-                <a:spcPts val="6659"/>
+                <a:spcPts val="6657"/>
               </a:lnSpc>
             </a:pPr>
             <a:r>
-              <a:rPr lang="en-US" sz="2663" b="1">
+              <a:rPr lang="en-US" sz="2662" b="true">
                 <a:solidFill>
                   <a:srgbClr val="0B533D"/>
                 </a:solidFill>
@@ -6953,11 +8186,11 @@
           <a:p>
             <a:pPr algn="l">
               <a:lnSpc>
-                <a:spcPts val="6659"/>
+                <a:spcPts val="6657"/>
               </a:lnSpc>
             </a:pPr>
             <a:r>
-              <a:rPr lang="en-US" sz="2663">
+              <a:rPr lang="en-US" sz="2662">
                 <a:solidFill>
                   <a:srgbClr val="000000"/>
                 </a:solidFill>
@@ -6972,11 +8205,11 @@
           <a:p>
             <a:pPr algn="l">
               <a:lnSpc>
-                <a:spcPts val="6659"/>
+                <a:spcPts val="6657"/>
               </a:lnSpc>
             </a:pPr>
             <a:r>
-              <a:rPr lang="en-US" sz="2663" b="1">
+              <a:rPr lang="en-US" sz="2662" b="true">
                 <a:solidFill>
                   <a:srgbClr val="0B533D"/>
                 </a:solidFill>
@@ -6991,11 +8224,11 @@
           <a:p>
             <a:pPr algn="l">
               <a:lnSpc>
-                <a:spcPts val="6659"/>
+                <a:spcPts val="6657"/>
               </a:lnSpc>
             </a:pPr>
             <a:r>
-              <a:rPr lang="en-US" sz="2663">
+              <a:rPr lang="en-US" sz="2662">
                 <a:solidFill>
                   <a:srgbClr val="000000"/>
                 </a:solidFill>
@@ -7010,11 +8243,11 @@
           <a:p>
             <a:pPr algn="l">
               <a:lnSpc>
-                <a:spcPts val="6659"/>
+                <a:spcPts val="6657"/>
               </a:lnSpc>
             </a:pPr>
             <a:r>
-              <a:rPr lang="en-US" sz="2663" b="1">
+              <a:rPr lang="en-US" sz="2662" b="true">
                 <a:solidFill>
                   <a:srgbClr val="0B533D"/>
                 </a:solidFill>
@@ -7029,11 +8262,11 @@
           <a:p>
             <a:pPr algn="l">
               <a:lnSpc>
-                <a:spcPts val="6659"/>
+                <a:spcPts val="6657"/>
               </a:lnSpc>
             </a:pPr>
             <a:r>
-              <a:rPr lang="en-US" sz="2663">
+              <a:rPr lang="en-US" sz="2662">
                 <a:solidFill>
                   <a:srgbClr val="000000"/>
                 </a:solidFill>
@@ -7049,34 +8282,34 @@
       </p:sp>
       <p:sp>
         <p:nvSpPr>
-          <p:cNvPr id="5" name="Freeform 5"/>
+          <p:cNvPr name="Freeform 6" id="6"/>
           <p:cNvSpPr/>
           <p:nvPr/>
         </p:nvSpPr>
         <p:spPr>
-          <a:xfrm>
-            <a:off x="13657487" y="437420"/>
-            <a:ext cx="4173313" cy="1270252"/>
+          <a:xfrm flipH="false" flipV="false" rot="0">
+            <a:off x="0" y="9424245"/>
+            <a:ext cx="18288000" cy="862755"/>
           </a:xfrm>
           <a:custGeom>
             <a:avLst/>
             <a:gdLst/>
             <a:ahLst/>
             <a:cxnLst/>
-            <a:rect l="l" t="t" r="r" b="b"/>
+            <a:rect r="r" b="b" t="t" l="l"/>
             <a:pathLst>
-              <a:path w="4173313" h="1270252">
+              <a:path h="862755" w="18288000">
                 <a:moveTo>
                   <a:pt x="0" y="0"/>
                 </a:moveTo>
                 <a:lnTo>
-                  <a:pt x="4173313" y="0"/>
+                  <a:pt x="18288000" y="0"/>
                 </a:lnTo>
                 <a:lnTo>
-                  <a:pt x="4173313" y="1270252"/>
+                  <a:pt x="18288000" y="862755"/>
                 </a:lnTo>
                 <a:lnTo>
-                  <a:pt x="0" y="1270252"/>
+                  <a:pt x="0" y="862755"/>
                 </a:lnTo>
                 <a:lnTo>
                   <a:pt x="0" y="0"/>
@@ -7086,113 +8319,36 @@
             </a:pathLst>
           </a:custGeom>
           <a:blipFill>
-            <a:blip r:embed="rId3"/>
+            <a:blip r:embed="rId4">
+              <a:extLst>
+                <a:ext uri="{96DAC541-7B7A-43D3-8B79-37D633B846F1}">
+                  <asvg:svgBlip xmlns:asvg="http://schemas.microsoft.com/office/drawing/2016/SVG/main" r:embed="rId5"/>
+                </a:ext>
+              </a:extLst>
+            </a:blip>
             <a:stretch>
-              <a:fillRect/>
+              <a:fillRect l="0" t="0" r="0" b="0"/>
             </a:stretch>
           </a:blipFill>
         </p:spPr>
       </p:sp>
-      <p:grpSp>
-        <p:nvGrpSpPr>
-          <p:cNvPr id="6" name="Group 6"/>
-          <p:cNvGrpSpPr/>
+      <p:sp>
+        <p:nvSpPr>
+          <p:cNvPr name="TextBox 7" id="7"/>
+          <p:cNvSpPr txBox="true"/>
           <p:nvPr/>
-        </p:nvGrpSpPr>
-        <p:grpSpPr>
-          <a:xfrm>
-            <a:off x="0" y="9677400"/>
-            <a:ext cx="18288000" cy="609600"/>
-            <a:chOff x="0" y="0"/>
-            <a:chExt cx="4816593" cy="160553"/>
-          </a:xfrm>
-        </p:grpSpPr>
-        <p:sp>
-          <p:nvSpPr>
-            <p:cNvPr id="7" name="Freeform 7"/>
-            <p:cNvSpPr/>
-            <p:nvPr/>
-          </p:nvSpPr>
-          <p:spPr>
-            <a:xfrm>
-              <a:off x="0" y="0"/>
-              <a:ext cx="4816592" cy="160553"/>
-            </a:xfrm>
-            <a:custGeom>
-              <a:avLst/>
-              <a:gdLst/>
-              <a:ahLst/>
-              <a:cxnLst/>
-              <a:rect l="l" t="t" r="r" b="b"/>
-              <a:pathLst>
-                <a:path w="4816592" h="160553">
-                  <a:moveTo>
-                    <a:pt x="0" y="0"/>
-                  </a:moveTo>
-                  <a:lnTo>
-                    <a:pt x="4816592" y="0"/>
-                  </a:lnTo>
-                  <a:lnTo>
-                    <a:pt x="4816592" y="160553"/>
-                  </a:lnTo>
-                  <a:lnTo>
-                    <a:pt x="0" y="160553"/>
-                  </a:lnTo>
-                  <a:close/>
-                </a:path>
-              </a:pathLst>
-            </a:custGeom>
-            <a:solidFill>
-              <a:srgbClr val="39FF5F"/>
-            </a:solidFill>
-          </p:spPr>
-        </p:sp>
-        <p:sp>
-          <p:nvSpPr>
-            <p:cNvPr id="8" name="TextBox 8"/>
-            <p:cNvSpPr txBox="1"/>
-            <p:nvPr/>
-          </p:nvSpPr>
-          <p:spPr>
-            <a:xfrm>
-              <a:off x="0" y="-66675"/>
-              <a:ext cx="4816593" cy="227228"/>
-            </a:xfrm>
-            <a:prstGeom prst="rect">
-              <a:avLst/>
-            </a:prstGeom>
-          </p:spPr>
-          <p:txBody>
-            <a:bodyPr lIns="50800" tIns="50800" rIns="50800" bIns="50800" rtlCol="0" anchor="ctr"/>
-            <a:lstStyle/>
-            <a:p>
-              <a:pPr algn="ctr">
-                <a:lnSpc>
-                  <a:spcPts val="3024"/>
-                </a:lnSpc>
-              </a:pPr>
-              <a:endParaRPr/>
-            </a:p>
-          </p:txBody>
-        </p:sp>
-      </p:grpSp>
-      <p:sp>
-        <p:nvSpPr>
-          <p:cNvPr id="9" name="TextBox 9"/>
-          <p:cNvSpPr txBox="1"/>
-          <p:nvPr/>
-        </p:nvSpPr>
-        <p:spPr>
-          <a:xfrm>
-            <a:off x="6208849" y="9741484"/>
-            <a:ext cx="5346634" cy="415370"/>
+        </p:nvSpPr>
+        <p:spPr>
+          <a:xfrm rot="0">
+            <a:off x="6208852" y="9703384"/>
+            <a:ext cx="5346630" cy="453466"/>
           </a:xfrm>
           <a:prstGeom prst="rect">
             <a:avLst/>
           </a:prstGeom>
         </p:spPr>
         <p:txBody>
-          <a:bodyPr lIns="0" tIns="0" rIns="0" bIns="0" rtlCol="0" anchor="t">
+          <a:bodyPr anchor="t" rtlCol="false" tIns="0" lIns="0" bIns="0" rIns="0">
             <a:spAutoFit/>
           </a:bodyPr>
           <a:lstStyle/>
@@ -7203,9 +8359,9 @@
               </a:lnSpc>
             </a:pPr>
             <a:r>
-              <a:rPr lang="en-US" sz="2700" dirty="0">
+              <a:rPr lang="en-US" sz="2700">
                 <a:solidFill>
-                  <a:srgbClr val="000000"/>
+                  <a:srgbClr val="FFFFFF"/>
                 </a:solidFill>
                 <a:latin typeface="Cambria"/>
                 <a:ea typeface="Cambria"/>
@@ -7216,6 +8372,52 @@
             </a:r>
           </a:p>
         </p:txBody>
+      </p:sp>
+      <p:sp>
+        <p:nvSpPr>
+          <p:cNvPr name="Freeform 8" id="8"/>
+          <p:cNvSpPr/>
+          <p:nvPr/>
+        </p:nvSpPr>
+        <p:spPr>
+          <a:xfrm flipH="false" flipV="false" rot="0">
+            <a:off x="14714122" y="342716"/>
+            <a:ext cx="3263458" cy="982059"/>
+          </a:xfrm>
+          <a:custGeom>
+            <a:avLst/>
+            <a:gdLst/>
+            <a:ahLst/>
+            <a:cxnLst/>
+            <a:rect r="r" b="b" t="t" l="l"/>
+            <a:pathLst>
+              <a:path h="982059" w="3263458">
+                <a:moveTo>
+                  <a:pt x="0" y="0"/>
+                </a:moveTo>
+                <a:lnTo>
+                  <a:pt x="3263458" y="0"/>
+                </a:lnTo>
+                <a:lnTo>
+                  <a:pt x="3263458" y="982059"/>
+                </a:lnTo>
+                <a:lnTo>
+                  <a:pt x="0" y="982059"/>
+                </a:lnTo>
+                <a:lnTo>
+                  <a:pt x="0" y="0"/>
+                </a:lnTo>
+                <a:close/>
+              </a:path>
+            </a:pathLst>
+          </a:custGeom>
+          <a:blipFill>
+            <a:blip r:embed="rId6"/>
+            <a:stretch>
+              <a:fillRect l="0" t="0" r="0" b="0"/>
+            </a:stretch>
+          </a:blipFill>
+        </p:spPr>
       </p:sp>
     </p:spTree>
   </p:cSld>
